--- a/report/Васильев_презентация.pptx
+++ b/report/Васильев_презентация.pptx
@@ -4,6 +4,9 @@
   <p:sldMasterIdLst>
     <p:sldMasterId id="2147483648" r:id="rId1"/>
   </p:sldMasterIdLst>
+  <p:notesMasterIdLst>
+    <p:notesMasterId r:id="rId18"/>
+  </p:notesMasterIdLst>
   <p:sldIdLst>
     <p:sldId id="256" r:id="rId2"/>
     <p:sldId id="257" r:id="rId3"/>
@@ -18,7 +21,9 @@
     <p:sldId id="270" r:id="rId12"/>
     <p:sldId id="271" r:id="rId13"/>
     <p:sldId id="272" r:id="rId14"/>
-    <p:sldId id="261" r:id="rId15"/>
+    <p:sldId id="274" r:id="rId15"/>
+    <p:sldId id="275" r:id="rId16"/>
+    <p:sldId id="261" r:id="rId17"/>
   </p:sldIdLst>
   <p:sldSz cx="12192000" cy="6858000"/>
   <p:notesSz cx="6858000" cy="9144000"/>
@@ -123,6 +128,1615 @@
     </p:ext>
   </p:extLst>
 </p:presentation>
+</file>
+
+<file path=ppt/notesMasters/notesMaster1.xml><?xml version="1.0" encoding="utf-8"?>
+<p:notesMaster xmlns:a="http://schemas.openxmlformats.org/drawingml/2006/main" xmlns:r="http://schemas.openxmlformats.org/officeDocument/2006/relationships" xmlns:p="http://schemas.openxmlformats.org/presentationml/2006/main">
+  <p:cSld>
+    <p:bg>
+      <p:bgRef idx="1001">
+        <a:schemeClr val="bg1"/>
+      </p:bgRef>
+    </p:bg>
+    <p:spTree>
+      <p:nvGrpSpPr>
+        <p:cNvPr id="1" name=""/>
+        <p:cNvGrpSpPr/>
+        <p:nvPr/>
+      </p:nvGrpSpPr>
+      <p:grpSpPr>
+        <a:xfrm>
+          <a:off x="0" y="0"/>
+          <a:ext cx="0" cy="0"/>
+          <a:chOff x="0" y="0"/>
+          <a:chExt cx="0" cy="0"/>
+        </a:xfrm>
+      </p:grpSpPr>
+      <p:sp>
+        <p:nvSpPr>
+          <p:cNvPr id="2" name="Верхний колонтитул 1"/>
+          <p:cNvSpPr>
+            <a:spLocks noGrp="1"/>
+          </p:cNvSpPr>
+          <p:nvPr>
+            <p:ph type="hdr" sz="quarter"/>
+          </p:nvPr>
+        </p:nvSpPr>
+        <p:spPr>
+          <a:xfrm>
+            <a:off x="0" y="0"/>
+            <a:ext cx="2971800" cy="458788"/>
+          </a:xfrm>
+          <a:prstGeom prst="rect">
+            <a:avLst/>
+          </a:prstGeom>
+        </p:spPr>
+        <p:txBody>
+          <a:bodyPr vert="horz" lIns="91440" tIns="45720" rIns="91440" bIns="45720" rtlCol="0"/>
+          <a:lstStyle>
+            <a:lvl1pPr algn="l">
+              <a:defRPr sz="1200"/>
+            </a:lvl1pPr>
+          </a:lstStyle>
+          <a:p>
+            <a:endParaRPr lang="ru-RU"/>
+          </a:p>
+        </p:txBody>
+      </p:sp>
+      <p:sp>
+        <p:nvSpPr>
+          <p:cNvPr id="3" name="Дата 2"/>
+          <p:cNvSpPr>
+            <a:spLocks noGrp="1"/>
+          </p:cNvSpPr>
+          <p:nvPr>
+            <p:ph type="dt" idx="1"/>
+          </p:nvPr>
+        </p:nvSpPr>
+        <p:spPr>
+          <a:xfrm>
+            <a:off x="3884613" y="0"/>
+            <a:ext cx="2971800" cy="458788"/>
+          </a:xfrm>
+          <a:prstGeom prst="rect">
+            <a:avLst/>
+          </a:prstGeom>
+        </p:spPr>
+        <p:txBody>
+          <a:bodyPr vert="horz" lIns="91440" tIns="45720" rIns="91440" bIns="45720" rtlCol="0"/>
+          <a:lstStyle>
+            <a:lvl1pPr algn="r">
+              <a:defRPr sz="1200"/>
+            </a:lvl1pPr>
+          </a:lstStyle>
+          <a:p>
+            <a:fld id="{F9581A8F-76AA-4AA6-8D80-40911592B414}" type="datetimeFigureOut">
+              <a:rPr lang="ru-RU" smtClean="0"/>
+              <a:t>23.12.2025</a:t>
+            </a:fld>
+            <a:endParaRPr lang="ru-RU"/>
+          </a:p>
+        </p:txBody>
+      </p:sp>
+      <p:sp>
+        <p:nvSpPr>
+          <p:cNvPr id="4" name="Образ слайда 3"/>
+          <p:cNvSpPr>
+            <a:spLocks noGrp="1" noRot="1" noChangeAspect="1"/>
+          </p:cNvSpPr>
+          <p:nvPr>
+            <p:ph type="sldImg" idx="2"/>
+          </p:nvPr>
+        </p:nvSpPr>
+        <p:spPr>
+          <a:xfrm>
+            <a:off x="685800" y="1143000"/>
+            <a:ext cx="5486400" cy="3086100"/>
+          </a:xfrm>
+          <a:prstGeom prst="rect">
+            <a:avLst/>
+          </a:prstGeom>
+          <a:noFill/>
+          <a:ln w="12700">
+            <a:solidFill>
+              <a:prstClr val="black"/>
+            </a:solidFill>
+          </a:ln>
+        </p:spPr>
+        <p:txBody>
+          <a:bodyPr vert="horz" lIns="91440" tIns="45720" rIns="91440" bIns="45720" rtlCol="0" anchor="ctr"/>
+          <a:lstStyle/>
+          <a:p>
+            <a:endParaRPr lang="ru-RU"/>
+          </a:p>
+        </p:txBody>
+      </p:sp>
+      <p:sp>
+        <p:nvSpPr>
+          <p:cNvPr id="5" name="Заметки 4"/>
+          <p:cNvSpPr>
+            <a:spLocks noGrp="1"/>
+          </p:cNvSpPr>
+          <p:nvPr>
+            <p:ph type="body" sz="quarter" idx="3"/>
+          </p:nvPr>
+        </p:nvSpPr>
+        <p:spPr>
+          <a:xfrm>
+            <a:off x="685800" y="4400550"/>
+            <a:ext cx="5486400" cy="3600450"/>
+          </a:xfrm>
+          <a:prstGeom prst="rect">
+            <a:avLst/>
+          </a:prstGeom>
+        </p:spPr>
+        <p:txBody>
+          <a:bodyPr vert="horz" lIns="91440" tIns="45720" rIns="91440" bIns="45720" rtlCol="0"/>
+          <a:lstStyle/>
+          <a:p>
+            <a:pPr lvl="0"/>
+            <a:r>
+              <a:rPr lang="ru-RU"/>
+              <a:t>Образец текста</a:t>
+            </a:r>
+          </a:p>
+          <a:p>
+            <a:pPr lvl="1"/>
+            <a:r>
+              <a:rPr lang="ru-RU"/>
+              <a:t>Второй уровень</a:t>
+            </a:r>
+          </a:p>
+          <a:p>
+            <a:pPr lvl="2"/>
+            <a:r>
+              <a:rPr lang="ru-RU"/>
+              <a:t>Третий уровень</a:t>
+            </a:r>
+          </a:p>
+          <a:p>
+            <a:pPr lvl="3"/>
+            <a:r>
+              <a:rPr lang="ru-RU"/>
+              <a:t>Четвертый уровень</a:t>
+            </a:r>
+          </a:p>
+          <a:p>
+            <a:pPr lvl="4"/>
+            <a:r>
+              <a:rPr lang="ru-RU"/>
+              <a:t>Пятый уровень</a:t>
+            </a:r>
+          </a:p>
+        </p:txBody>
+      </p:sp>
+      <p:sp>
+        <p:nvSpPr>
+          <p:cNvPr id="6" name="Нижний колонтитул 5"/>
+          <p:cNvSpPr>
+            <a:spLocks noGrp="1"/>
+          </p:cNvSpPr>
+          <p:nvPr>
+            <p:ph type="ftr" sz="quarter" idx="4"/>
+          </p:nvPr>
+        </p:nvSpPr>
+        <p:spPr>
+          <a:xfrm>
+            <a:off x="0" y="8685213"/>
+            <a:ext cx="2971800" cy="458787"/>
+          </a:xfrm>
+          <a:prstGeom prst="rect">
+            <a:avLst/>
+          </a:prstGeom>
+        </p:spPr>
+        <p:txBody>
+          <a:bodyPr vert="horz" lIns="91440" tIns="45720" rIns="91440" bIns="45720" rtlCol="0" anchor="b"/>
+          <a:lstStyle>
+            <a:lvl1pPr algn="l">
+              <a:defRPr sz="1200"/>
+            </a:lvl1pPr>
+          </a:lstStyle>
+          <a:p>
+            <a:endParaRPr lang="ru-RU"/>
+          </a:p>
+        </p:txBody>
+      </p:sp>
+      <p:sp>
+        <p:nvSpPr>
+          <p:cNvPr id="7" name="Номер слайда 6"/>
+          <p:cNvSpPr>
+            <a:spLocks noGrp="1"/>
+          </p:cNvSpPr>
+          <p:nvPr>
+            <p:ph type="sldNum" sz="quarter" idx="5"/>
+          </p:nvPr>
+        </p:nvSpPr>
+        <p:spPr>
+          <a:xfrm>
+            <a:off x="3884613" y="8685213"/>
+            <a:ext cx="2971800" cy="458787"/>
+          </a:xfrm>
+          <a:prstGeom prst="rect">
+            <a:avLst/>
+          </a:prstGeom>
+        </p:spPr>
+        <p:txBody>
+          <a:bodyPr vert="horz" lIns="91440" tIns="45720" rIns="91440" bIns="45720" rtlCol="0" anchor="b"/>
+          <a:lstStyle>
+            <a:lvl1pPr algn="r">
+              <a:defRPr sz="1200"/>
+            </a:lvl1pPr>
+          </a:lstStyle>
+          <a:p>
+            <a:fld id="{E71128FA-4846-4E6A-BAAB-BB326523E9F0}" type="slidenum">
+              <a:rPr lang="ru-RU" smtClean="0"/>
+              <a:t>‹#›</a:t>
+            </a:fld>
+            <a:endParaRPr lang="ru-RU"/>
+          </a:p>
+        </p:txBody>
+      </p:sp>
+    </p:spTree>
+    <p:extLst>
+      <p:ext uri="{BB962C8B-B14F-4D97-AF65-F5344CB8AC3E}">
+        <p14:creationId xmlns:p14="http://schemas.microsoft.com/office/powerpoint/2010/main" val="592040040"/>
+      </p:ext>
+    </p:extLst>
+  </p:cSld>
+  <p:clrMap bg1="lt1" tx1="dk1" bg2="lt2" tx2="dk2" accent1="accent1" accent2="accent2" accent3="accent3" accent4="accent4" accent5="accent5" accent6="accent6" hlink="hlink" folHlink="folHlink"/>
+  <p:notesStyle>
+    <a:lvl1pPr marL="0" algn="l" defTabSz="914400" rtl="0" eaLnBrk="1" latinLnBrk="0" hangingPunct="1">
+      <a:defRPr sz="1200" kern="1200">
+        <a:solidFill>
+          <a:schemeClr val="tx1"/>
+        </a:solidFill>
+        <a:latin typeface="+mn-lt"/>
+        <a:ea typeface="+mn-ea"/>
+        <a:cs typeface="+mn-cs"/>
+      </a:defRPr>
+    </a:lvl1pPr>
+    <a:lvl2pPr marL="457200" algn="l" defTabSz="914400" rtl="0" eaLnBrk="1" latinLnBrk="0" hangingPunct="1">
+      <a:defRPr sz="1200" kern="1200">
+        <a:solidFill>
+          <a:schemeClr val="tx1"/>
+        </a:solidFill>
+        <a:latin typeface="+mn-lt"/>
+        <a:ea typeface="+mn-ea"/>
+        <a:cs typeface="+mn-cs"/>
+      </a:defRPr>
+    </a:lvl2pPr>
+    <a:lvl3pPr marL="914400" algn="l" defTabSz="914400" rtl="0" eaLnBrk="1" latinLnBrk="0" hangingPunct="1">
+      <a:defRPr sz="1200" kern="1200">
+        <a:solidFill>
+          <a:schemeClr val="tx1"/>
+        </a:solidFill>
+        <a:latin typeface="+mn-lt"/>
+        <a:ea typeface="+mn-ea"/>
+        <a:cs typeface="+mn-cs"/>
+      </a:defRPr>
+    </a:lvl3pPr>
+    <a:lvl4pPr marL="1371600" algn="l" defTabSz="914400" rtl="0" eaLnBrk="1" latinLnBrk="0" hangingPunct="1">
+      <a:defRPr sz="1200" kern="1200">
+        <a:solidFill>
+          <a:schemeClr val="tx1"/>
+        </a:solidFill>
+        <a:latin typeface="+mn-lt"/>
+        <a:ea typeface="+mn-ea"/>
+        <a:cs typeface="+mn-cs"/>
+      </a:defRPr>
+    </a:lvl4pPr>
+    <a:lvl5pPr marL="1828800" algn="l" defTabSz="914400" rtl="0" eaLnBrk="1" latinLnBrk="0" hangingPunct="1">
+      <a:defRPr sz="1200" kern="1200">
+        <a:solidFill>
+          <a:schemeClr val="tx1"/>
+        </a:solidFill>
+        <a:latin typeface="+mn-lt"/>
+        <a:ea typeface="+mn-ea"/>
+        <a:cs typeface="+mn-cs"/>
+      </a:defRPr>
+    </a:lvl5pPr>
+    <a:lvl6pPr marL="2286000" algn="l" defTabSz="914400" rtl="0" eaLnBrk="1" latinLnBrk="0" hangingPunct="1">
+      <a:defRPr sz="1200" kern="1200">
+        <a:solidFill>
+          <a:schemeClr val="tx1"/>
+        </a:solidFill>
+        <a:latin typeface="+mn-lt"/>
+        <a:ea typeface="+mn-ea"/>
+        <a:cs typeface="+mn-cs"/>
+      </a:defRPr>
+    </a:lvl6pPr>
+    <a:lvl7pPr marL="2743200" algn="l" defTabSz="914400" rtl="0" eaLnBrk="1" latinLnBrk="0" hangingPunct="1">
+      <a:defRPr sz="1200" kern="1200">
+        <a:solidFill>
+          <a:schemeClr val="tx1"/>
+        </a:solidFill>
+        <a:latin typeface="+mn-lt"/>
+        <a:ea typeface="+mn-ea"/>
+        <a:cs typeface="+mn-cs"/>
+      </a:defRPr>
+    </a:lvl7pPr>
+    <a:lvl8pPr marL="3200400" algn="l" defTabSz="914400" rtl="0" eaLnBrk="1" latinLnBrk="0" hangingPunct="1">
+      <a:defRPr sz="1200" kern="1200">
+        <a:solidFill>
+          <a:schemeClr val="tx1"/>
+        </a:solidFill>
+        <a:latin typeface="+mn-lt"/>
+        <a:ea typeface="+mn-ea"/>
+        <a:cs typeface="+mn-cs"/>
+      </a:defRPr>
+    </a:lvl8pPr>
+    <a:lvl9pPr marL="3657600" algn="l" defTabSz="914400" rtl="0" eaLnBrk="1" latinLnBrk="0" hangingPunct="1">
+      <a:defRPr sz="1200" kern="1200">
+        <a:solidFill>
+          <a:schemeClr val="tx1"/>
+        </a:solidFill>
+        <a:latin typeface="+mn-lt"/>
+        <a:ea typeface="+mn-ea"/>
+        <a:cs typeface="+mn-cs"/>
+      </a:defRPr>
+    </a:lvl9pPr>
+  </p:notesStyle>
+</p:notesMaster>
+</file>
+
+<file path=ppt/notesSlides/notesSlide1.xml><?xml version="1.0" encoding="utf-8"?>
+<p:notes xmlns:a="http://schemas.openxmlformats.org/drawingml/2006/main" xmlns:r="http://schemas.openxmlformats.org/officeDocument/2006/relationships" xmlns:p="http://schemas.openxmlformats.org/presentationml/2006/main">
+  <p:cSld>
+    <p:spTree>
+      <p:nvGrpSpPr>
+        <p:cNvPr id="1" name=""/>
+        <p:cNvGrpSpPr/>
+        <p:nvPr/>
+      </p:nvGrpSpPr>
+      <p:grpSpPr>
+        <a:xfrm>
+          <a:off x="0" y="0"/>
+          <a:ext cx="0" cy="0"/>
+          <a:chOff x="0" y="0"/>
+          <a:chExt cx="0" cy="0"/>
+        </a:xfrm>
+      </p:grpSpPr>
+      <p:sp>
+        <p:nvSpPr>
+          <p:cNvPr id="2" name="Образ слайда 1"/>
+          <p:cNvSpPr>
+            <a:spLocks noGrp="1" noRot="1" noChangeAspect="1"/>
+          </p:cNvSpPr>
+          <p:nvPr>
+            <p:ph type="sldImg"/>
+          </p:nvPr>
+        </p:nvSpPr>
+        <p:spPr/>
+      </p:sp>
+      <p:sp>
+        <p:nvSpPr>
+          <p:cNvPr id="3" name="Заметки 2"/>
+          <p:cNvSpPr>
+            <a:spLocks noGrp="1"/>
+          </p:cNvSpPr>
+          <p:nvPr>
+            <p:ph type="body" idx="1"/>
+          </p:nvPr>
+        </p:nvSpPr>
+        <p:spPr/>
+        <p:txBody>
+          <a:bodyPr/>
+          <a:lstStyle/>
+          <a:p>
+            <a:endParaRPr lang="ru-RU" dirty="0"/>
+          </a:p>
+        </p:txBody>
+      </p:sp>
+      <p:sp>
+        <p:nvSpPr>
+          <p:cNvPr id="4" name="Номер слайда 3"/>
+          <p:cNvSpPr>
+            <a:spLocks noGrp="1"/>
+          </p:cNvSpPr>
+          <p:nvPr>
+            <p:ph type="sldNum" sz="quarter" idx="5"/>
+          </p:nvPr>
+        </p:nvSpPr>
+        <p:spPr/>
+        <p:txBody>
+          <a:bodyPr/>
+          <a:lstStyle/>
+          <a:p>
+            <a:fld id="{E71128FA-4846-4E6A-BAAB-BB326523E9F0}" type="slidenum">
+              <a:rPr lang="ru-RU" smtClean="0"/>
+              <a:t>1</a:t>
+            </a:fld>
+            <a:endParaRPr lang="ru-RU"/>
+          </a:p>
+        </p:txBody>
+      </p:sp>
+    </p:spTree>
+    <p:extLst>
+      <p:ext uri="{BB962C8B-B14F-4D97-AF65-F5344CB8AC3E}">
+        <p14:creationId xmlns:p14="http://schemas.microsoft.com/office/powerpoint/2010/main" val="3231307821"/>
+      </p:ext>
+    </p:extLst>
+  </p:cSld>
+  <p:clrMapOvr>
+    <a:masterClrMapping/>
+  </p:clrMapOvr>
+</p:notes>
+</file>
+
+<file path=ppt/notesSlides/notesSlide10.xml><?xml version="1.0" encoding="utf-8"?>
+<p:notes xmlns:a="http://schemas.openxmlformats.org/drawingml/2006/main" xmlns:r="http://schemas.openxmlformats.org/officeDocument/2006/relationships" xmlns:p="http://schemas.openxmlformats.org/presentationml/2006/main">
+  <p:cSld>
+    <p:spTree>
+      <p:nvGrpSpPr>
+        <p:cNvPr id="1" name=""/>
+        <p:cNvGrpSpPr/>
+        <p:nvPr/>
+      </p:nvGrpSpPr>
+      <p:grpSpPr>
+        <a:xfrm>
+          <a:off x="0" y="0"/>
+          <a:ext cx="0" cy="0"/>
+          <a:chOff x="0" y="0"/>
+          <a:chExt cx="0" cy="0"/>
+        </a:xfrm>
+      </p:grpSpPr>
+      <p:sp>
+        <p:nvSpPr>
+          <p:cNvPr id="2" name="Образ слайда 1"/>
+          <p:cNvSpPr>
+            <a:spLocks noGrp="1" noRot="1" noChangeAspect="1"/>
+          </p:cNvSpPr>
+          <p:nvPr>
+            <p:ph type="sldImg"/>
+          </p:nvPr>
+        </p:nvSpPr>
+        <p:spPr/>
+      </p:sp>
+      <p:sp>
+        <p:nvSpPr>
+          <p:cNvPr id="3" name="Заметки 2"/>
+          <p:cNvSpPr>
+            <a:spLocks noGrp="1"/>
+          </p:cNvSpPr>
+          <p:nvPr>
+            <p:ph type="body" idx="1"/>
+          </p:nvPr>
+        </p:nvSpPr>
+        <p:spPr/>
+        <p:txBody>
+          <a:bodyPr/>
+          <a:lstStyle/>
+          <a:p>
+            <a:endParaRPr lang="ru-RU" dirty="0"/>
+          </a:p>
+        </p:txBody>
+      </p:sp>
+      <p:sp>
+        <p:nvSpPr>
+          <p:cNvPr id="4" name="Номер слайда 3"/>
+          <p:cNvSpPr>
+            <a:spLocks noGrp="1"/>
+          </p:cNvSpPr>
+          <p:nvPr>
+            <p:ph type="sldNum" sz="quarter" idx="5"/>
+          </p:nvPr>
+        </p:nvSpPr>
+        <p:spPr/>
+        <p:txBody>
+          <a:bodyPr/>
+          <a:lstStyle/>
+          <a:p>
+            <a:fld id="{E71128FA-4846-4E6A-BAAB-BB326523E9F0}" type="slidenum">
+              <a:rPr lang="ru-RU" smtClean="0"/>
+              <a:t>10</a:t>
+            </a:fld>
+            <a:endParaRPr lang="ru-RU"/>
+          </a:p>
+        </p:txBody>
+      </p:sp>
+    </p:spTree>
+    <p:extLst>
+      <p:ext uri="{BB962C8B-B14F-4D97-AF65-F5344CB8AC3E}">
+        <p14:creationId xmlns:p14="http://schemas.microsoft.com/office/powerpoint/2010/main" val="1803354465"/>
+      </p:ext>
+    </p:extLst>
+  </p:cSld>
+  <p:clrMapOvr>
+    <a:masterClrMapping/>
+  </p:clrMapOvr>
+</p:notes>
+</file>
+
+<file path=ppt/notesSlides/notesSlide11.xml><?xml version="1.0" encoding="utf-8"?>
+<p:notes xmlns:a="http://schemas.openxmlformats.org/drawingml/2006/main" xmlns:r="http://schemas.openxmlformats.org/officeDocument/2006/relationships" xmlns:p="http://schemas.openxmlformats.org/presentationml/2006/main">
+  <p:cSld>
+    <p:spTree>
+      <p:nvGrpSpPr>
+        <p:cNvPr id="1" name=""/>
+        <p:cNvGrpSpPr/>
+        <p:nvPr/>
+      </p:nvGrpSpPr>
+      <p:grpSpPr>
+        <a:xfrm>
+          <a:off x="0" y="0"/>
+          <a:ext cx="0" cy="0"/>
+          <a:chOff x="0" y="0"/>
+          <a:chExt cx="0" cy="0"/>
+        </a:xfrm>
+      </p:grpSpPr>
+      <p:sp>
+        <p:nvSpPr>
+          <p:cNvPr id="2" name="Образ слайда 1"/>
+          <p:cNvSpPr>
+            <a:spLocks noGrp="1" noRot="1" noChangeAspect="1"/>
+          </p:cNvSpPr>
+          <p:nvPr>
+            <p:ph type="sldImg"/>
+          </p:nvPr>
+        </p:nvSpPr>
+        <p:spPr/>
+      </p:sp>
+      <p:sp>
+        <p:nvSpPr>
+          <p:cNvPr id="3" name="Заметки 2"/>
+          <p:cNvSpPr>
+            <a:spLocks noGrp="1"/>
+          </p:cNvSpPr>
+          <p:nvPr>
+            <p:ph type="body" idx="1"/>
+          </p:nvPr>
+        </p:nvSpPr>
+        <p:spPr/>
+        <p:txBody>
+          <a:bodyPr/>
+          <a:lstStyle/>
+          <a:p>
+            <a:endParaRPr lang="ru-RU" dirty="0"/>
+          </a:p>
+        </p:txBody>
+      </p:sp>
+      <p:sp>
+        <p:nvSpPr>
+          <p:cNvPr id="4" name="Номер слайда 3"/>
+          <p:cNvSpPr>
+            <a:spLocks noGrp="1"/>
+          </p:cNvSpPr>
+          <p:nvPr>
+            <p:ph type="sldNum" sz="quarter" idx="5"/>
+          </p:nvPr>
+        </p:nvSpPr>
+        <p:spPr/>
+        <p:txBody>
+          <a:bodyPr/>
+          <a:lstStyle/>
+          <a:p>
+            <a:fld id="{E71128FA-4846-4E6A-BAAB-BB326523E9F0}" type="slidenum">
+              <a:rPr lang="ru-RU" smtClean="0"/>
+              <a:t>11</a:t>
+            </a:fld>
+            <a:endParaRPr lang="ru-RU"/>
+          </a:p>
+        </p:txBody>
+      </p:sp>
+    </p:spTree>
+    <p:extLst>
+      <p:ext uri="{BB962C8B-B14F-4D97-AF65-F5344CB8AC3E}">
+        <p14:creationId xmlns:p14="http://schemas.microsoft.com/office/powerpoint/2010/main" val="4041519750"/>
+      </p:ext>
+    </p:extLst>
+  </p:cSld>
+  <p:clrMapOvr>
+    <a:masterClrMapping/>
+  </p:clrMapOvr>
+</p:notes>
+</file>
+
+<file path=ppt/notesSlides/notesSlide12.xml><?xml version="1.0" encoding="utf-8"?>
+<p:notes xmlns:a="http://schemas.openxmlformats.org/drawingml/2006/main" xmlns:r="http://schemas.openxmlformats.org/officeDocument/2006/relationships" xmlns:p="http://schemas.openxmlformats.org/presentationml/2006/main">
+  <p:cSld>
+    <p:spTree>
+      <p:nvGrpSpPr>
+        <p:cNvPr id="1" name=""/>
+        <p:cNvGrpSpPr/>
+        <p:nvPr/>
+      </p:nvGrpSpPr>
+      <p:grpSpPr>
+        <a:xfrm>
+          <a:off x="0" y="0"/>
+          <a:ext cx="0" cy="0"/>
+          <a:chOff x="0" y="0"/>
+          <a:chExt cx="0" cy="0"/>
+        </a:xfrm>
+      </p:grpSpPr>
+      <p:sp>
+        <p:nvSpPr>
+          <p:cNvPr id="2" name="Образ слайда 1"/>
+          <p:cNvSpPr>
+            <a:spLocks noGrp="1" noRot="1" noChangeAspect="1"/>
+          </p:cNvSpPr>
+          <p:nvPr>
+            <p:ph type="sldImg"/>
+          </p:nvPr>
+        </p:nvSpPr>
+        <p:spPr/>
+      </p:sp>
+      <p:sp>
+        <p:nvSpPr>
+          <p:cNvPr id="3" name="Заметки 2"/>
+          <p:cNvSpPr>
+            <a:spLocks noGrp="1"/>
+          </p:cNvSpPr>
+          <p:nvPr>
+            <p:ph type="body" idx="1"/>
+          </p:nvPr>
+        </p:nvSpPr>
+        <p:spPr/>
+        <p:txBody>
+          <a:bodyPr/>
+          <a:lstStyle/>
+          <a:p>
+            <a:endParaRPr lang="ru-RU" dirty="0"/>
+          </a:p>
+        </p:txBody>
+      </p:sp>
+      <p:sp>
+        <p:nvSpPr>
+          <p:cNvPr id="4" name="Номер слайда 3"/>
+          <p:cNvSpPr>
+            <a:spLocks noGrp="1"/>
+          </p:cNvSpPr>
+          <p:nvPr>
+            <p:ph type="sldNum" sz="quarter" idx="5"/>
+          </p:nvPr>
+        </p:nvSpPr>
+        <p:spPr/>
+        <p:txBody>
+          <a:bodyPr/>
+          <a:lstStyle/>
+          <a:p>
+            <a:fld id="{E71128FA-4846-4E6A-BAAB-BB326523E9F0}" type="slidenum">
+              <a:rPr lang="ru-RU" smtClean="0"/>
+              <a:t>12</a:t>
+            </a:fld>
+            <a:endParaRPr lang="ru-RU"/>
+          </a:p>
+        </p:txBody>
+      </p:sp>
+    </p:spTree>
+    <p:extLst>
+      <p:ext uri="{BB962C8B-B14F-4D97-AF65-F5344CB8AC3E}">
+        <p14:creationId xmlns:p14="http://schemas.microsoft.com/office/powerpoint/2010/main" val="1719946843"/>
+      </p:ext>
+    </p:extLst>
+  </p:cSld>
+  <p:clrMapOvr>
+    <a:masterClrMapping/>
+  </p:clrMapOvr>
+</p:notes>
+</file>
+
+<file path=ppt/notesSlides/notesSlide13.xml><?xml version="1.0" encoding="utf-8"?>
+<p:notes xmlns:a="http://schemas.openxmlformats.org/drawingml/2006/main" xmlns:r="http://schemas.openxmlformats.org/officeDocument/2006/relationships" xmlns:p="http://schemas.openxmlformats.org/presentationml/2006/main">
+  <p:cSld>
+    <p:spTree>
+      <p:nvGrpSpPr>
+        <p:cNvPr id="1" name=""/>
+        <p:cNvGrpSpPr/>
+        <p:nvPr/>
+      </p:nvGrpSpPr>
+      <p:grpSpPr>
+        <a:xfrm>
+          <a:off x="0" y="0"/>
+          <a:ext cx="0" cy="0"/>
+          <a:chOff x="0" y="0"/>
+          <a:chExt cx="0" cy="0"/>
+        </a:xfrm>
+      </p:grpSpPr>
+      <p:sp>
+        <p:nvSpPr>
+          <p:cNvPr id="2" name="Образ слайда 1"/>
+          <p:cNvSpPr>
+            <a:spLocks noGrp="1" noRot="1" noChangeAspect="1"/>
+          </p:cNvSpPr>
+          <p:nvPr>
+            <p:ph type="sldImg"/>
+          </p:nvPr>
+        </p:nvSpPr>
+        <p:spPr/>
+      </p:sp>
+      <p:sp>
+        <p:nvSpPr>
+          <p:cNvPr id="3" name="Заметки 2"/>
+          <p:cNvSpPr>
+            <a:spLocks noGrp="1"/>
+          </p:cNvSpPr>
+          <p:nvPr>
+            <p:ph type="body" idx="1"/>
+          </p:nvPr>
+        </p:nvSpPr>
+        <p:spPr/>
+        <p:txBody>
+          <a:bodyPr/>
+          <a:lstStyle/>
+          <a:p>
+            <a:endParaRPr lang="ru-RU" dirty="0"/>
+          </a:p>
+        </p:txBody>
+      </p:sp>
+      <p:sp>
+        <p:nvSpPr>
+          <p:cNvPr id="4" name="Номер слайда 3"/>
+          <p:cNvSpPr>
+            <a:spLocks noGrp="1"/>
+          </p:cNvSpPr>
+          <p:nvPr>
+            <p:ph type="sldNum" sz="quarter" idx="5"/>
+          </p:nvPr>
+        </p:nvSpPr>
+        <p:spPr/>
+        <p:txBody>
+          <a:bodyPr/>
+          <a:lstStyle/>
+          <a:p>
+            <a:fld id="{E71128FA-4846-4E6A-BAAB-BB326523E9F0}" type="slidenum">
+              <a:rPr lang="ru-RU" smtClean="0"/>
+              <a:t>13</a:t>
+            </a:fld>
+            <a:endParaRPr lang="ru-RU"/>
+          </a:p>
+        </p:txBody>
+      </p:sp>
+    </p:spTree>
+    <p:extLst>
+      <p:ext uri="{BB962C8B-B14F-4D97-AF65-F5344CB8AC3E}">
+        <p14:creationId xmlns:p14="http://schemas.microsoft.com/office/powerpoint/2010/main" val="2325807854"/>
+      </p:ext>
+    </p:extLst>
+  </p:cSld>
+  <p:clrMapOvr>
+    <a:masterClrMapping/>
+  </p:clrMapOvr>
+</p:notes>
+</file>
+
+<file path=ppt/notesSlides/notesSlide14.xml><?xml version="1.0" encoding="utf-8"?>
+<p:notes xmlns:a="http://schemas.openxmlformats.org/drawingml/2006/main" xmlns:r="http://schemas.openxmlformats.org/officeDocument/2006/relationships" xmlns:p="http://schemas.openxmlformats.org/presentationml/2006/main">
+  <p:cSld>
+    <p:spTree>
+      <p:nvGrpSpPr>
+        <p:cNvPr id="1" name=""/>
+        <p:cNvGrpSpPr/>
+        <p:nvPr/>
+      </p:nvGrpSpPr>
+      <p:grpSpPr>
+        <a:xfrm>
+          <a:off x="0" y="0"/>
+          <a:ext cx="0" cy="0"/>
+          <a:chOff x="0" y="0"/>
+          <a:chExt cx="0" cy="0"/>
+        </a:xfrm>
+      </p:grpSpPr>
+      <p:sp>
+        <p:nvSpPr>
+          <p:cNvPr id="2" name="Образ слайда 1"/>
+          <p:cNvSpPr>
+            <a:spLocks noGrp="1" noRot="1" noChangeAspect="1"/>
+          </p:cNvSpPr>
+          <p:nvPr>
+            <p:ph type="sldImg"/>
+          </p:nvPr>
+        </p:nvSpPr>
+        <p:spPr/>
+      </p:sp>
+      <p:sp>
+        <p:nvSpPr>
+          <p:cNvPr id="3" name="Заметки 2"/>
+          <p:cNvSpPr>
+            <a:spLocks noGrp="1"/>
+          </p:cNvSpPr>
+          <p:nvPr>
+            <p:ph type="body" idx="1"/>
+          </p:nvPr>
+        </p:nvSpPr>
+        <p:spPr/>
+        <p:txBody>
+          <a:bodyPr/>
+          <a:lstStyle/>
+          <a:p>
+            <a:endParaRPr lang="ru-RU" dirty="0"/>
+          </a:p>
+        </p:txBody>
+      </p:sp>
+      <p:sp>
+        <p:nvSpPr>
+          <p:cNvPr id="4" name="Номер слайда 3"/>
+          <p:cNvSpPr>
+            <a:spLocks noGrp="1"/>
+          </p:cNvSpPr>
+          <p:nvPr>
+            <p:ph type="sldNum" sz="quarter" idx="5"/>
+          </p:nvPr>
+        </p:nvSpPr>
+        <p:spPr/>
+        <p:txBody>
+          <a:bodyPr/>
+          <a:lstStyle/>
+          <a:p>
+            <a:fld id="{E71128FA-4846-4E6A-BAAB-BB326523E9F0}" type="slidenum">
+              <a:rPr lang="ru-RU" smtClean="0"/>
+              <a:t>14</a:t>
+            </a:fld>
+            <a:endParaRPr lang="ru-RU"/>
+          </a:p>
+        </p:txBody>
+      </p:sp>
+    </p:spTree>
+    <p:extLst>
+      <p:ext uri="{BB962C8B-B14F-4D97-AF65-F5344CB8AC3E}">
+        <p14:creationId xmlns:p14="http://schemas.microsoft.com/office/powerpoint/2010/main" val="3171040863"/>
+      </p:ext>
+    </p:extLst>
+  </p:cSld>
+  <p:clrMapOvr>
+    <a:masterClrMapping/>
+  </p:clrMapOvr>
+</p:notes>
+</file>
+
+<file path=ppt/notesSlides/notesSlide15.xml><?xml version="1.0" encoding="utf-8"?>
+<p:notes xmlns:a="http://schemas.openxmlformats.org/drawingml/2006/main" xmlns:r="http://schemas.openxmlformats.org/officeDocument/2006/relationships" xmlns:p="http://schemas.openxmlformats.org/presentationml/2006/main">
+  <p:cSld>
+    <p:spTree>
+      <p:nvGrpSpPr>
+        <p:cNvPr id="1" name=""/>
+        <p:cNvGrpSpPr/>
+        <p:nvPr/>
+      </p:nvGrpSpPr>
+      <p:grpSpPr>
+        <a:xfrm>
+          <a:off x="0" y="0"/>
+          <a:ext cx="0" cy="0"/>
+          <a:chOff x="0" y="0"/>
+          <a:chExt cx="0" cy="0"/>
+        </a:xfrm>
+      </p:grpSpPr>
+      <p:sp>
+        <p:nvSpPr>
+          <p:cNvPr id="2" name="Образ слайда 1"/>
+          <p:cNvSpPr>
+            <a:spLocks noGrp="1" noRot="1" noChangeAspect="1"/>
+          </p:cNvSpPr>
+          <p:nvPr>
+            <p:ph type="sldImg"/>
+          </p:nvPr>
+        </p:nvSpPr>
+        <p:spPr/>
+      </p:sp>
+      <p:sp>
+        <p:nvSpPr>
+          <p:cNvPr id="3" name="Заметки 2"/>
+          <p:cNvSpPr>
+            <a:spLocks noGrp="1"/>
+          </p:cNvSpPr>
+          <p:nvPr>
+            <p:ph type="body" idx="1"/>
+          </p:nvPr>
+        </p:nvSpPr>
+        <p:spPr/>
+        <p:txBody>
+          <a:bodyPr/>
+          <a:lstStyle/>
+          <a:p>
+            <a:endParaRPr lang="ru-RU" dirty="0"/>
+          </a:p>
+        </p:txBody>
+      </p:sp>
+      <p:sp>
+        <p:nvSpPr>
+          <p:cNvPr id="4" name="Номер слайда 3"/>
+          <p:cNvSpPr>
+            <a:spLocks noGrp="1"/>
+          </p:cNvSpPr>
+          <p:nvPr>
+            <p:ph type="sldNum" sz="quarter" idx="5"/>
+          </p:nvPr>
+        </p:nvSpPr>
+        <p:spPr/>
+        <p:txBody>
+          <a:bodyPr/>
+          <a:lstStyle/>
+          <a:p>
+            <a:fld id="{E71128FA-4846-4E6A-BAAB-BB326523E9F0}" type="slidenum">
+              <a:rPr lang="ru-RU" smtClean="0"/>
+              <a:t>16</a:t>
+            </a:fld>
+            <a:endParaRPr lang="ru-RU"/>
+          </a:p>
+        </p:txBody>
+      </p:sp>
+    </p:spTree>
+    <p:extLst>
+      <p:ext uri="{BB962C8B-B14F-4D97-AF65-F5344CB8AC3E}">
+        <p14:creationId xmlns:p14="http://schemas.microsoft.com/office/powerpoint/2010/main" val="3078329639"/>
+      </p:ext>
+    </p:extLst>
+  </p:cSld>
+  <p:clrMapOvr>
+    <a:masterClrMapping/>
+  </p:clrMapOvr>
+</p:notes>
+</file>
+
+<file path=ppt/notesSlides/notesSlide2.xml><?xml version="1.0" encoding="utf-8"?>
+<p:notes xmlns:a="http://schemas.openxmlformats.org/drawingml/2006/main" xmlns:r="http://schemas.openxmlformats.org/officeDocument/2006/relationships" xmlns:p="http://schemas.openxmlformats.org/presentationml/2006/main">
+  <p:cSld>
+    <p:spTree>
+      <p:nvGrpSpPr>
+        <p:cNvPr id="1" name=""/>
+        <p:cNvGrpSpPr/>
+        <p:nvPr/>
+      </p:nvGrpSpPr>
+      <p:grpSpPr>
+        <a:xfrm>
+          <a:off x="0" y="0"/>
+          <a:ext cx="0" cy="0"/>
+          <a:chOff x="0" y="0"/>
+          <a:chExt cx="0" cy="0"/>
+        </a:xfrm>
+      </p:grpSpPr>
+      <p:sp>
+        <p:nvSpPr>
+          <p:cNvPr id="2" name="Образ слайда 1"/>
+          <p:cNvSpPr>
+            <a:spLocks noGrp="1" noRot="1" noChangeAspect="1"/>
+          </p:cNvSpPr>
+          <p:nvPr>
+            <p:ph type="sldImg"/>
+          </p:nvPr>
+        </p:nvSpPr>
+        <p:spPr/>
+      </p:sp>
+      <p:sp>
+        <p:nvSpPr>
+          <p:cNvPr id="3" name="Заметки 2"/>
+          <p:cNvSpPr>
+            <a:spLocks noGrp="1"/>
+          </p:cNvSpPr>
+          <p:nvPr>
+            <p:ph type="body" idx="1"/>
+          </p:nvPr>
+        </p:nvSpPr>
+        <p:spPr/>
+        <p:txBody>
+          <a:bodyPr/>
+          <a:lstStyle/>
+          <a:p>
+            <a:endParaRPr lang="ru-RU" dirty="0"/>
+          </a:p>
+        </p:txBody>
+      </p:sp>
+      <p:sp>
+        <p:nvSpPr>
+          <p:cNvPr id="4" name="Номер слайда 3"/>
+          <p:cNvSpPr>
+            <a:spLocks noGrp="1"/>
+          </p:cNvSpPr>
+          <p:nvPr>
+            <p:ph type="sldNum" sz="quarter" idx="5"/>
+          </p:nvPr>
+        </p:nvSpPr>
+        <p:spPr/>
+        <p:txBody>
+          <a:bodyPr/>
+          <a:lstStyle/>
+          <a:p>
+            <a:fld id="{E71128FA-4846-4E6A-BAAB-BB326523E9F0}" type="slidenum">
+              <a:rPr lang="ru-RU" smtClean="0"/>
+              <a:t>2</a:t>
+            </a:fld>
+            <a:endParaRPr lang="ru-RU"/>
+          </a:p>
+        </p:txBody>
+      </p:sp>
+    </p:spTree>
+    <p:extLst>
+      <p:ext uri="{BB962C8B-B14F-4D97-AF65-F5344CB8AC3E}">
+        <p14:creationId xmlns:p14="http://schemas.microsoft.com/office/powerpoint/2010/main" val="3644994214"/>
+      </p:ext>
+    </p:extLst>
+  </p:cSld>
+  <p:clrMapOvr>
+    <a:masterClrMapping/>
+  </p:clrMapOvr>
+</p:notes>
+</file>
+
+<file path=ppt/notesSlides/notesSlide3.xml><?xml version="1.0" encoding="utf-8"?>
+<p:notes xmlns:a="http://schemas.openxmlformats.org/drawingml/2006/main" xmlns:r="http://schemas.openxmlformats.org/officeDocument/2006/relationships" xmlns:p="http://schemas.openxmlformats.org/presentationml/2006/main">
+  <p:cSld>
+    <p:spTree>
+      <p:nvGrpSpPr>
+        <p:cNvPr id="1" name=""/>
+        <p:cNvGrpSpPr/>
+        <p:nvPr/>
+      </p:nvGrpSpPr>
+      <p:grpSpPr>
+        <a:xfrm>
+          <a:off x="0" y="0"/>
+          <a:ext cx="0" cy="0"/>
+          <a:chOff x="0" y="0"/>
+          <a:chExt cx="0" cy="0"/>
+        </a:xfrm>
+      </p:grpSpPr>
+      <p:sp>
+        <p:nvSpPr>
+          <p:cNvPr id="2" name="Образ слайда 1"/>
+          <p:cNvSpPr>
+            <a:spLocks noGrp="1" noRot="1" noChangeAspect="1"/>
+          </p:cNvSpPr>
+          <p:nvPr>
+            <p:ph type="sldImg"/>
+          </p:nvPr>
+        </p:nvSpPr>
+        <p:spPr/>
+      </p:sp>
+      <p:sp>
+        <p:nvSpPr>
+          <p:cNvPr id="3" name="Заметки 2"/>
+          <p:cNvSpPr>
+            <a:spLocks noGrp="1"/>
+          </p:cNvSpPr>
+          <p:nvPr>
+            <p:ph type="body" idx="1"/>
+          </p:nvPr>
+        </p:nvSpPr>
+        <p:spPr/>
+        <p:txBody>
+          <a:bodyPr/>
+          <a:lstStyle/>
+          <a:p>
+            <a:endParaRPr lang="ru-RU" dirty="0"/>
+          </a:p>
+        </p:txBody>
+      </p:sp>
+      <p:sp>
+        <p:nvSpPr>
+          <p:cNvPr id="4" name="Номер слайда 3"/>
+          <p:cNvSpPr>
+            <a:spLocks noGrp="1"/>
+          </p:cNvSpPr>
+          <p:nvPr>
+            <p:ph type="sldNum" sz="quarter" idx="5"/>
+          </p:nvPr>
+        </p:nvSpPr>
+        <p:spPr/>
+        <p:txBody>
+          <a:bodyPr/>
+          <a:lstStyle/>
+          <a:p>
+            <a:fld id="{E71128FA-4846-4E6A-BAAB-BB326523E9F0}" type="slidenum">
+              <a:rPr lang="ru-RU" smtClean="0"/>
+              <a:t>3</a:t>
+            </a:fld>
+            <a:endParaRPr lang="ru-RU"/>
+          </a:p>
+        </p:txBody>
+      </p:sp>
+    </p:spTree>
+    <p:extLst>
+      <p:ext uri="{BB962C8B-B14F-4D97-AF65-F5344CB8AC3E}">
+        <p14:creationId xmlns:p14="http://schemas.microsoft.com/office/powerpoint/2010/main" val="2605511901"/>
+      </p:ext>
+    </p:extLst>
+  </p:cSld>
+  <p:clrMapOvr>
+    <a:masterClrMapping/>
+  </p:clrMapOvr>
+</p:notes>
+</file>
+
+<file path=ppt/notesSlides/notesSlide4.xml><?xml version="1.0" encoding="utf-8"?>
+<p:notes xmlns:a="http://schemas.openxmlformats.org/drawingml/2006/main" xmlns:r="http://schemas.openxmlformats.org/officeDocument/2006/relationships" xmlns:p="http://schemas.openxmlformats.org/presentationml/2006/main">
+  <p:cSld>
+    <p:spTree>
+      <p:nvGrpSpPr>
+        <p:cNvPr id="1" name=""/>
+        <p:cNvGrpSpPr/>
+        <p:nvPr/>
+      </p:nvGrpSpPr>
+      <p:grpSpPr>
+        <a:xfrm>
+          <a:off x="0" y="0"/>
+          <a:ext cx="0" cy="0"/>
+          <a:chOff x="0" y="0"/>
+          <a:chExt cx="0" cy="0"/>
+        </a:xfrm>
+      </p:grpSpPr>
+      <p:sp>
+        <p:nvSpPr>
+          <p:cNvPr id="2" name="Образ слайда 1"/>
+          <p:cNvSpPr>
+            <a:spLocks noGrp="1" noRot="1" noChangeAspect="1"/>
+          </p:cNvSpPr>
+          <p:nvPr>
+            <p:ph type="sldImg"/>
+          </p:nvPr>
+        </p:nvSpPr>
+        <p:spPr/>
+      </p:sp>
+      <p:sp>
+        <p:nvSpPr>
+          <p:cNvPr id="3" name="Заметки 2"/>
+          <p:cNvSpPr>
+            <a:spLocks noGrp="1"/>
+          </p:cNvSpPr>
+          <p:nvPr>
+            <p:ph type="body" idx="1"/>
+          </p:nvPr>
+        </p:nvSpPr>
+        <p:spPr/>
+        <p:txBody>
+          <a:bodyPr/>
+          <a:lstStyle/>
+          <a:p>
+            <a:endParaRPr lang="ru-RU" dirty="0"/>
+          </a:p>
+        </p:txBody>
+      </p:sp>
+      <p:sp>
+        <p:nvSpPr>
+          <p:cNvPr id="4" name="Номер слайда 3"/>
+          <p:cNvSpPr>
+            <a:spLocks noGrp="1"/>
+          </p:cNvSpPr>
+          <p:nvPr>
+            <p:ph type="sldNum" sz="quarter" idx="5"/>
+          </p:nvPr>
+        </p:nvSpPr>
+        <p:spPr/>
+        <p:txBody>
+          <a:bodyPr/>
+          <a:lstStyle/>
+          <a:p>
+            <a:fld id="{E71128FA-4846-4E6A-BAAB-BB326523E9F0}" type="slidenum">
+              <a:rPr lang="ru-RU" smtClean="0"/>
+              <a:t>4</a:t>
+            </a:fld>
+            <a:endParaRPr lang="ru-RU"/>
+          </a:p>
+        </p:txBody>
+      </p:sp>
+    </p:spTree>
+    <p:extLst>
+      <p:ext uri="{BB962C8B-B14F-4D97-AF65-F5344CB8AC3E}">
+        <p14:creationId xmlns:p14="http://schemas.microsoft.com/office/powerpoint/2010/main" val="2308179279"/>
+      </p:ext>
+    </p:extLst>
+  </p:cSld>
+  <p:clrMapOvr>
+    <a:masterClrMapping/>
+  </p:clrMapOvr>
+</p:notes>
+</file>
+
+<file path=ppt/notesSlides/notesSlide5.xml><?xml version="1.0" encoding="utf-8"?>
+<p:notes xmlns:a="http://schemas.openxmlformats.org/drawingml/2006/main" xmlns:r="http://schemas.openxmlformats.org/officeDocument/2006/relationships" xmlns:p="http://schemas.openxmlformats.org/presentationml/2006/main">
+  <p:cSld>
+    <p:spTree>
+      <p:nvGrpSpPr>
+        <p:cNvPr id="1" name=""/>
+        <p:cNvGrpSpPr/>
+        <p:nvPr/>
+      </p:nvGrpSpPr>
+      <p:grpSpPr>
+        <a:xfrm>
+          <a:off x="0" y="0"/>
+          <a:ext cx="0" cy="0"/>
+          <a:chOff x="0" y="0"/>
+          <a:chExt cx="0" cy="0"/>
+        </a:xfrm>
+      </p:grpSpPr>
+      <p:sp>
+        <p:nvSpPr>
+          <p:cNvPr id="2" name="Образ слайда 1"/>
+          <p:cNvSpPr>
+            <a:spLocks noGrp="1" noRot="1" noChangeAspect="1"/>
+          </p:cNvSpPr>
+          <p:nvPr>
+            <p:ph type="sldImg"/>
+          </p:nvPr>
+        </p:nvSpPr>
+        <p:spPr/>
+      </p:sp>
+      <p:sp>
+        <p:nvSpPr>
+          <p:cNvPr id="3" name="Заметки 2"/>
+          <p:cNvSpPr>
+            <a:spLocks noGrp="1"/>
+          </p:cNvSpPr>
+          <p:nvPr>
+            <p:ph type="body" idx="1"/>
+          </p:nvPr>
+        </p:nvSpPr>
+        <p:spPr/>
+        <p:txBody>
+          <a:bodyPr/>
+          <a:lstStyle/>
+          <a:p>
+            <a:endParaRPr lang="ru-RU" dirty="0"/>
+          </a:p>
+        </p:txBody>
+      </p:sp>
+      <p:sp>
+        <p:nvSpPr>
+          <p:cNvPr id="4" name="Номер слайда 3"/>
+          <p:cNvSpPr>
+            <a:spLocks noGrp="1"/>
+          </p:cNvSpPr>
+          <p:nvPr>
+            <p:ph type="sldNum" sz="quarter" idx="5"/>
+          </p:nvPr>
+        </p:nvSpPr>
+        <p:spPr/>
+        <p:txBody>
+          <a:bodyPr/>
+          <a:lstStyle/>
+          <a:p>
+            <a:fld id="{E71128FA-4846-4E6A-BAAB-BB326523E9F0}" type="slidenum">
+              <a:rPr lang="ru-RU" smtClean="0"/>
+              <a:t>5</a:t>
+            </a:fld>
+            <a:endParaRPr lang="ru-RU"/>
+          </a:p>
+        </p:txBody>
+      </p:sp>
+    </p:spTree>
+    <p:extLst>
+      <p:ext uri="{BB962C8B-B14F-4D97-AF65-F5344CB8AC3E}">
+        <p14:creationId xmlns:p14="http://schemas.microsoft.com/office/powerpoint/2010/main" val="351567504"/>
+      </p:ext>
+    </p:extLst>
+  </p:cSld>
+  <p:clrMapOvr>
+    <a:masterClrMapping/>
+  </p:clrMapOvr>
+</p:notes>
+</file>
+
+<file path=ppt/notesSlides/notesSlide6.xml><?xml version="1.0" encoding="utf-8"?>
+<p:notes xmlns:a="http://schemas.openxmlformats.org/drawingml/2006/main" xmlns:r="http://schemas.openxmlformats.org/officeDocument/2006/relationships" xmlns:p="http://schemas.openxmlformats.org/presentationml/2006/main">
+  <p:cSld>
+    <p:spTree>
+      <p:nvGrpSpPr>
+        <p:cNvPr id="1" name=""/>
+        <p:cNvGrpSpPr/>
+        <p:nvPr/>
+      </p:nvGrpSpPr>
+      <p:grpSpPr>
+        <a:xfrm>
+          <a:off x="0" y="0"/>
+          <a:ext cx="0" cy="0"/>
+          <a:chOff x="0" y="0"/>
+          <a:chExt cx="0" cy="0"/>
+        </a:xfrm>
+      </p:grpSpPr>
+      <p:sp>
+        <p:nvSpPr>
+          <p:cNvPr id="2" name="Образ слайда 1"/>
+          <p:cNvSpPr>
+            <a:spLocks noGrp="1" noRot="1" noChangeAspect="1"/>
+          </p:cNvSpPr>
+          <p:nvPr>
+            <p:ph type="sldImg"/>
+          </p:nvPr>
+        </p:nvSpPr>
+        <p:spPr/>
+      </p:sp>
+      <p:sp>
+        <p:nvSpPr>
+          <p:cNvPr id="3" name="Заметки 2"/>
+          <p:cNvSpPr>
+            <a:spLocks noGrp="1"/>
+          </p:cNvSpPr>
+          <p:nvPr>
+            <p:ph type="body" idx="1"/>
+          </p:nvPr>
+        </p:nvSpPr>
+        <p:spPr/>
+        <p:txBody>
+          <a:bodyPr/>
+          <a:lstStyle/>
+          <a:p>
+            <a:endParaRPr lang="ru-RU" dirty="0"/>
+          </a:p>
+        </p:txBody>
+      </p:sp>
+      <p:sp>
+        <p:nvSpPr>
+          <p:cNvPr id="4" name="Номер слайда 3"/>
+          <p:cNvSpPr>
+            <a:spLocks noGrp="1"/>
+          </p:cNvSpPr>
+          <p:nvPr>
+            <p:ph type="sldNum" sz="quarter" idx="5"/>
+          </p:nvPr>
+        </p:nvSpPr>
+        <p:spPr/>
+        <p:txBody>
+          <a:bodyPr/>
+          <a:lstStyle/>
+          <a:p>
+            <a:fld id="{E71128FA-4846-4E6A-BAAB-BB326523E9F0}" type="slidenum">
+              <a:rPr lang="ru-RU" smtClean="0"/>
+              <a:t>6</a:t>
+            </a:fld>
+            <a:endParaRPr lang="ru-RU"/>
+          </a:p>
+        </p:txBody>
+      </p:sp>
+    </p:spTree>
+    <p:extLst>
+      <p:ext uri="{BB962C8B-B14F-4D97-AF65-F5344CB8AC3E}">
+        <p14:creationId xmlns:p14="http://schemas.microsoft.com/office/powerpoint/2010/main" val="3423868345"/>
+      </p:ext>
+    </p:extLst>
+  </p:cSld>
+  <p:clrMapOvr>
+    <a:masterClrMapping/>
+  </p:clrMapOvr>
+</p:notes>
+</file>
+
+<file path=ppt/notesSlides/notesSlide7.xml><?xml version="1.0" encoding="utf-8"?>
+<p:notes xmlns:a="http://schemas.openxmlformats.org/drawingml/2006/main" xmlns:r="http://schemas.openxmlformats.org/officeDocument/2006/relationships" xmlns:p="http://schemas.openxmlformats.org/presentationml/2006/main">
+  <p:cSld>
+    <p:spTree>
+      <p:nvGrpSpPr>
+        <p:cNvPr id="1" name=""/>
+        <p:cNvGrpSpPr/>
+        <p:nvPr/>
+      </p:nvGrpSpPr>
+      <p:grpSpPr>
+        <a:xfrm>
+          <a:off x="0" y="0"/>
+          <a:ext cx="0" cy="0"/>
+          <a:chOff x="0" y="0"/>
+          <a:chExt cx="0" cy="0"/>
+        </a:xfrm>
+      </p:grpSpPr>
+      <p:sp>
+        <p:nvSpPr>
+          <p:cNvPr id="2" name="Образ слайда 1"/>
+          <p:cNvSpPr>
+            <a:spLocks noGrp="1" noRot="1" noChangeAspect="1"/>
+          </p:cNvSpPr>
+          <p:nvPr>
+            <p:ph type="sldImg"/>
+          </p:nvPr>
+        </p:nvSpPr>
+        <p:spPr/>
+      </p:sp>
+      <p:sp>
+        <p:nvSpPr>
+          <p:cNvPr id="3" name="Заметки 2"/>
+          <p:cNvSpPr>
+            <a:spLocks noGrp="1"/>
+          </p:cNvSpPr>
+          <p:nvPr>
+            <p:ph type="body" idx="1"/>
+          </p:nvPr>
+        </p:nvSpPr>
+        <p:spPr/>
+        <p:txBody>
+          <a:bodyPr/>
+          <a:lstStyle/>
+          <a:p>
+            <a:endParaRPr lang="ru-RU" dirty="0"/>
+          </a:p>
+        </p:txBody>
+      </p:sp>
+      <p:sp>
+        <p:nvSpPr>
+          <p:cNvPr id="4" name="Номер слайда 3"/>
+          <p:cNvSpPr>
+            <a:spLocks noGrp="1"/>
+          </p:cNvSpPr>
+          <p:nvPr>
+            <p:ph type="sldNum" sz="quarter" idx="5"/>
+          </p:nvPr>
+        </p:nvSpPr>
+        <p:spPr/>
+        <p:txBody>
+          <a:bodyPr/>
+          <a:lstStyle/>
+          <a:p>
+            <a:fld id="{E71128FA-4846-4E6A-BAAB-BB326523E9F0}" type="slidenum">
+              <a:rPr lang="ru-RU" smtClean="0"/>
+              <a:t>7</a:t>
+            </a:fld>
+            <a:endParaRPr lang="ru-RU"/>
+          </a:p>
+        </p:txBody>
+      </p:sp>
+    </p:spTree>
+    <p:extLst>
+      <p:ext uri="{BB962C8B-B14F-4D97-AF65-F5344CB8AC3E}">
+        <p14:creationId xmlns:p14="http://schemas.microsoft.com/office/powerpoint/2010/main" val="3379593000"/>
+      </p:ext>
+    </p:extLst>
+  </p:cSld>
+  <p:clrMapOvr>
+    <a:masterClrMapping/>
+  </p:clrMapOvr>
+</p:notes>
+</file>
+
+<file path=ppt/notesSlides/notesSlide8.xml><?xml version="1.0" encoding="utf-8"?>
+<p:notes xmlns:a="http://schemas.openxmlformats.org/drawingml/2006/main" xmlns:r="http://schemas.openxmlformats.org/officeDocument/2006/relationships" xmlns:p="http://schemas.openxmlformats.org/presentationml/2006/main">
+  <p:cSld>
+    <p:spTree>
+      <p:nvGrpSpPr>
+        <p:cNvPr id="1" name=""/>
+        <p:cNvGrpSpPr/>
+        <p:nvPr/>
+      </p:nvGrpSpPr>
+      <p:grpSpPr>
+        <a:xfrm>
+          <a:off x="0" y="0"/>
+          <a:ext cx="0" cy="0"/>
+          <a:chOff x="0" y="0"/>
+          <a:chExt cx="0" cy="0"/>
+        </a:xfrm>
+      </p:grpSpPr>
+      <p:sp>
+        <p:nvSpPr>
+          <p:cNvPr id="2" name="Образ слайда 1"/>
+          <p:cNvSpPr>
+            <a:spLocks noGrp="1" noRot="1" noChangeAspect="1"/>
+          </p:cNvSpPr>
+          <p:nvPr>
+            <p:ph type="sldImg"/>
+          </p:nvPr>
+        </p:nvSpPr>
+        <p:spPr/>
+      </p:sp>
+      <p:sp>
+        <p:nvSpPr>
+          <p:cNvPr id="3" name="Заметки 2"/>
+          <p:cNvSpPr>
+            <a:spLocks noGrp="1"/>
+          </p:cNvSpPr>
+          <p:nvPr>
+            <p:ph type="body" idx="1"/>
+          </p:nvPr>
+        </p:nvSpPr>
+        <p:spPr/>
+        <p:txBody>
+          <a:bodyPr/>
+          <a:lstStyle/>
+          <a:p>
+            <a:endParaRPr lang="ru-RU" dirty="0"/>
+          </a:p>
+        </p:txBody>
+      </p:sp>
+      <p:sp>
+        <p:nvSpPr>
+          <p:cNvPr id="4" name="Номер слайда 3"/>
+          <p:cNvSpPr>
+            <a:spLocks noGrp="1"/>
+          </p:cNvSpPr>
+          <p:nvPr>
+            <p:ph type="sldNum" sz="quarter" idx="5"/>
+          </p:nvPr>
+        </p:nvSpPr>
+        <p:spPr/>
+        <p:txBody>
+          <a:bodyPr/>
+          <a:lstStyle/>
+          <a:p>
+            <a:fld id="{E71128FA-4846-4E6A-BAAB-BB326523E9F0}" type="slidenum">
+              <a:rPr lang="ru-RU" smtClean="0"/>
+              <a:t>8</a:t>
+            </a:fld>
+            <a:endParaRPr lang="ru-RU"/>
+          </a:p>
+        </p:txBody>
+      </p:sp>
+    </p:spTree>
+    <p:extLst>
+      <p:ext uri="{BB962C8B-B14F-4D97-AF65-F5344CB8AC3E}">
+        <p14:creationId xmlns:p14="http://schemas.microsoft.com/office/powerpoint/2010/main" val="796069992"/>
+      </p:ext>
+    </p:extLst>
+  </p:cSld>
+  <p:clrMapOvr>
+    <a:masterClrMapping/>
+  </p:clrMapOvr>
+</p:notes>
+</file>
+
+<file path=ppt/notesSlides/notesSlide9.xml><?xml version="1.0" encoding="utf-8"?>
+<p:notes xmlns:a="http://schemas.openxmlformats.org/drawingml/2006/main" xmlns:r="http://schemas.openxmlformats.org/officeDocument/2006/relationships" xmlns:p="http://schemas.openxmlformats.org/presentationml/2006/main">
+  <p:cSld>
+    <p:spTree>
+      <p:nvGrpSpPr>
+        <p:cNvPr id="1" name=""/>
+        <p:cNvGrpSpPr/>
+        <p:nvPr/>
+      </p:nvGrpSpPr>
+      <p:grpSpPr>
+        <a:xfrm>
+          <a:off x="0" y="0"/>
+          <a:ext cx="0" cy="0"/>
+          <a:chOff x="0" y="0"/>
+          <a:chExt cx="0" cy="0"/>
+        </a:xfrm>
+      </p:grpSpPr>
+      <p:sp>
+        <p:nvSpPr>
+          <p:cNvPr id="2" name="Образ слайда 1"/>
+          <p:cNvSpPr>
+            <a:spLocks noGrp="1" noRot="1" noChangeAspect="1"/>
+          </p:cNvSpPr>
+          <p:nvPr>
+            <p:ph type="sldImg"/>
+          </p:nvPr>
+        </p:nvSpPr>
+        <p:spPr/>
+      </p:sp>
+      <p:sp>
+        <p:nvSpPr>
+          <p:cNvPr id="3" name="Заметки 2"/>
+          <p:cNvSpPr>
+            <a:spLocks noGrp="1"/>
+          </p:cNvSpPr>
+          <p:nvPr>
+            <p:ph type="body" idx="1"/>
+          </p:nvPr>
+        </p:nvSpPr>
+        <p:spPr/>
+        <p:txBody>
+          <a:bodyPr/>
+          <a:lstStyle/>
+          <a:p>
+            <a:endParaRPr lang="ru-RU" dirty="0"/>
+          </a:p>
+        </p:txBody>
+      </p:sp>
+      <p:sp>
+        <p:nvSpPr>
+          <p:cNvPr id="4" name="Номер слайда 3"/>
+          <p:cNvSpPr>
+            <a:spLocks noGrp="1"/>
+          </p:cNvSpPr>
+          <p:nvPr>
+            <p:ph type="sldNum" sz="quarter" idx="5"/>
+          </p:nvPr>
+        </p:nvSpPr>
+        <p:spPr/>
+        <p:txBody>
+          <a:bodyPr/>
+          <a:lstStyle/>
+          <a:p>
+            <a:fld id="{E71128FA-4846-4E6A-BAAB-BB326523E9F0}" type="slidenum">
+              <a:rPr lang="ru-RU" smtClean="0"/>
+              <a:t>9</a:t>
+            </a:fld>
+            <a:endParaRPr lang="ru-RU"/>
+          </a:p>
+        </p:txBody>
+      </p:sp>
+    </p:spTree>
+    <p:extLst>
+      <p:ext uri="{BB962C8B-B14F-4D97-AF65-F5344CB8AC3E}">
+        <p14:creationId xmlns:p14="http://schemas.microsoft.com/office/powerpoint/2010/main" val="3804153102"/>
+      </p:ext>
+    </p:extLst>
+  </p:cSld>
+  <p:clrMapOvr>
+    <a:masterClrMapping/>
+  </p:clrMapOvr>
+</p:notes>
 </file>
 
 <file path=ppt/slideLayouts/slideLayout1.xml><?xml version="1.0" encoding="utf-8"?>
@@ -670,7 +2284,7 @@
           <p:nvPr/>
         </p:nvPicPr>
         <p:blipFill>
-          <a:blip r:embed="rId2"/>
+          <a:blip r:embed="rId3"/>
           <a:stretch>
             <a:fillRect/>
           </a:stretch>
@@ -901,7 +2515,7 @@
           <p:nvPr/>
         </p:nvPicPr>
         <p:blipFill>
-          <a:blip r:embed="rId2"/>
+          <a:blip r:embed="rId3"/>
           <a:stretch>
             <a:fillRect/>
           </a:stretch>
@@ -1015,7 +2629,7 @@
           <p:nvPr/>
         </p:nvPicPr>
         <p:blipFill>
-          <a:blip r:embed="rId3">
+          <a:blip r:embed="rId4">
             <a:extLst>
               <a:ext uri="{28A0092B-C50C-407E-A947-70E740481C1C}">
                 <a14:useLocalDpi xmlns:a14="http://schemas.microsoft.com/office/drawing/2010/main" val="0"/>
@@ -1139,7 +2753,7 @@
           <p:nvPr/>
         </p:nvPicPr>
         <p:blipFill>
-          <a:blip r:embed="rId2"/>
+          <a:blip r:embed="rId3"/>
           <a:stretch>
             <a:fillRect/>
           </a:stretch>
@@ -1253,7 +2867,7 @@
           <p:nvPr/>
         </p:nvPicPr>
         <p:blipFill>
-          <a:blip r:embed="rId3">
+          <a:blip r:embed="rId4">
             <a:extLst>
               <a:ext uri="{28A0092B-C50C-407E-A947-70E740481C1C}">
                 <a14:useLocalDpi xmlns:a14="http://schemas.microsoft.com/office/drawing/2010/main" val="0"/>
@@ -1339,7 +2953,7 @@
           <p:nvPr/>
         </p:nvPicPr>
         <p:blipFill>
-          <a:blip r:embed="rId4">
+          <a:blip r:embed="rId5">
             <a:extLst>
               <a:ext uri="{28A0092B-C50C-407E-A947-70E740481C1C}">
                 <a14:useLocalDpi xmlns:a14="http://schemas.microsoft.com/office/drawing/2010/main" val="0"/>
@@ -1449,7 +3063,7 @@
           <p:nvPr/>
         </p:nvPicPr>
         <p:blipFill>
-          <a:blip r:embed="rId2"/>
+          <a:blip r:embed="rId3"/>
           <a:stretch>
             <a:fillRect/>
           </a:stretch>
@@ -1518,8 +3132,8 @@
         </p:nvSpPr>
         <p:spPr>
           <a:xfrm>
-            <a:off x="3654769" y="565511"/>
-            <a:ext cx="4666406" cy="461665"/>
+            <a:off x="2742633" y="565511"/>
+            <a:ext cx="6490688" cy="461665"/>
           </a:xfrm>
           <a:prstGeom prst="rect">
             <a:avLst/>
@@ -1537,7 +3151,7 @@
               <a:rPr lang="ru-RU" sz="2400" b="1" dirty="0">
                 <a:latin typeface="Times New Roman"/>
               </a:rPr>
-              <a:t>Реализация слоя представления</a:t>
+              <a:t>Реализация слоя клиентского представления</a:t>
             </a:r>
             <a:endParaRPr lang="ru-RU" sz="2400" dirty="0">
               <a:latin typeface="Times New Roman"/>
@@ -1560,7 +3174,7 @@
           <p:nvPr/>
         </p:nvPicPr>
         <p:blipFill>
-          <a:blip r:embed="rId3">
+          <a:blip r:embed="rId4">
             <a:extLst>
               <a:ext uri="{28A0092B-C50C-407E-A947-70E740481C1C}">
                 <a14:useLocalDpi xmlns:a14="http://schemas.microsoft.com/office/drawing/2010/main" val="0"/>
@@ -1654,7 +3268,7 @@
           <p:nvPr/>
         </p:nvPicPr>
         <p:blipFill>
-          <a:blip r:embed="rId4">
+          <a:blip r:embed="rId5">
             <a:extLst>
               <a:ext uri="{28A0092B-C50C-407E-A947-70E740481C1C}">
                 <a14:useLocalDpi xmlns:a14="http://schemas.microsoft.com/office/drawing/2010/main" val="0"/>
@@ -1764,7 +3378,7 @@
           <p:nvPr/>
         </p:nvPicPr>
         <p:blipFill>
-          <a:blip r:embed="rId2"/>
+          <a:blip r:embed="rId3"/>
           <a:stretch>
             <a:fillRect/>
           </a:stretch>
@@ -1869,7 +3483,7 @@
           <p:nvPr/>
         </p:nvPicPr>
         <p:blipFill>
-          <a:blip r:embed="rId3" cstate="print">
+          <a:blip r:embed="rId4" cstate="print">
             <a:extLst>
               <a:ext uri="{28A0092B-C50C-407E-A947-70E740481C1C}">
                 <a14:useLocalDpi xmlns:a14="http://schemas.microsoft.com/office/drawing/2010/main" val="0"/>
@@ -1881,8 +3495,8 @@
         </p:blipFill>
         <p:spPr>
           <a:xfrm>
-            <a:off x="338593" y="2313890"/>
-            <a:ext cx="5638258" cy="3066575"/>
+            <a:off x="338593" y="2314946"/>
+            <a:ext cx="5638258" cy="3064462"/>
           </a:xfrm>
           <a:prstGeom prst="rect">
             <a:avLst/>
@@ -1931,7 +3545,7 @@
                 <a:ea typeface="Calibri" panose="020F0502020204030204" pitchFamily="34" charset="0"/>
                 <a:cs typeface="Times New Roman" panose="02020603050405020304" pitchFamily="18" charset="0"/>
               </a:rPr>
-              <a:t>Страница управления расписанием</a:t>
+              <a:t>Страница входа</a:t>
             </a:r>
             <a:endParaRPr lang="ru-RU" sz="1400" dirty="0">
               <a:latin typeface="Times New Roman" panose="02020603050405020304" pitchFamily="18" charset="0"/>
@@ -1955,7 +3569,7 @@
           <p:nvPr/>
         </p:nvPicPr>
         <p:blipFill>
-          <a:blip r:embed="rId4" cstate="print">
+          <a:blip r:embed="rId5" cstate="print">
             <a:extLst>
               <a:ext uri="{28A0092B-C50C-407E-A947-70E740481C1C}">
                 <a14:useLocalDpi xmlns:a14="http://schemas.microsoft.com/office/drawing/2010/main" val="0"/>
@@ -1967,8 +3581,8 @@
         </p:blipFill>
         <p:spPr>
           <a:xfrm>
-            <a:off x="6215908" y="2313890"/>
-            <a:ext cx="5636740" cy="3066575"/>
+            <a:off x="6225448" y="2313890"/>
+            <a:ext cx="5617660" cy="3066575"/>
           </a:xfrm>
           <a:prstGeom prst="rect">
             <a:avLst/>
@@ -2017,7 +3631,7 @@
                 <a:ea typeface="Calibri" panose="020F0502020204030204" pitchFamily="34" charset="0"/>
                 <a:cs typeface="Times New Roman" panose="02020603050405020304" pitchFamily="18" charset="0"/>
               </a:rPr>
-              <a:t>Страница управления тегами </a:t>
+              <a:t>Страница регистрации</a:t>
             </a:r>
             <a:endParaRPr lang="ru-RU" sz="1400" dirty="0">
               <a:latin typeface="Times New Roman" panose="02020603050405020304" pitchFamily="18" charset="0"/>
@@ -2040,6 +3654,608 @@
 </file>
 
 <file path=ppt/slides/slide14.xml><?xml version="1.0" encoding="utf-8"?>
+<p:sld xmlns:a="http://schemas.openxmlformats.org/drawingml/2006/main" xmlns:r="http://schemas.openxmlformats.org/officeDocument/2006/relationships" xmlns:p="http://schemas.openxmlformats.org/presentationml/2006/main">
+  <p:cSld>
+    <p:spTree>
+      <p:nvGrpSpPr>
+        <p:cNvPr id="1" name=""/>
+        <p:cNvGrpSpPr/>
+        <p:nvPr/>
+      </p:nvGrpSpPr>
+      <p:grpSpPr>
+        <a:xfrm>
+          <a:off x="0" y="0"/>
+          <a:ext cx="0" cy="0"/>
+          <a:chOff x="0" y="0"/>
+          <a:chExt cx="0" cy="0"/>
+        </a:xfrm>
+      </p:grpSpPr>
+      <p:pic>
+        <p:nvPicPr>
+          <p:cNvPr id="2" name="Рисунок 1"/>
+          <p:cNvPicPr>
+            <a:picLocks noChangeAspect="1"/>
+          </p:cNvPicPr>
+          <p:nvPr/>
+        </p:nvPicPr>
+        <p:blipFill>
+          <a:blip r:embed="rId3"/>
+          <a:stretch>
+            <a:fillRect/>
+          </a:stretch>
+        </p:blipFill>
+        <p:spPr>
+          <a:xfrm>
+            <a:off x="11116056" y="39624"/>
+            <a:ext cx="868680" cy="987552"/>
+          </a:xfrm>
+          <a:prstGeom prst="rect">
+            <a:avLst/>
+          </a:prstGeom>
+        </p:spPr>
+      </p:pic>
+      <p:sp>
+        <p:nvSpPr>
+          <p:cNvPr id="6" name="Прямоугольник 5"/>
+          <p:cNvSpPr/>
+          <p:nvPr/>
+        </p:nvSpPr>
+        <p:spPr>
+          <a:xfrm>
+            <a:off x="11103864" y="5919216"/>
+            <a:ext cx="164592" cy="234696"/>
+          </a:xfrm>
+          <a:prstGeom prst="rect">
+            <a:avLst/>
+          </a:prstGeom>
+        </p:spPr>
+        <p:txBody>
+          <a:bodyPr wrap="none" lIns="0" tIns="0" rIns="0" bIns="0">
+            <a:noAutofit/>
+          </a:bodyPr>
+          <a:lstStyle/>
+          <a:p>
+            <a:pPr indent="0"/>
+            <a:r>
+              <a:rPr lang="ru-RU" sz="2200" b="1" dirty="0">
+                <a:latin typeface="Times New Roman"/>
+              </a:rPr>
+              <a:t>14</a:t>
+            </a:r>
+            <a:endParaRPr lang="ru" sz="2200" b="1" dirty="0">
+              <a:latin typeface="Times New Roman"/>
+            </a:endParaRPr>
+          </a:p>
+        </p:txBody>
+      </p:sp>
+      <p:sp>
+        <p:nvSpPr>
+          <p:cNvPr id="7" name="TextBox 6">
+            <a:extLst>
+              <a:ext uri="{FF2B5EF4-FFF2-40B4-BE49-F238E27FC236}">
+                <a16:creationId xmlns:a16="http://schemas.microsoft.com/office/drawing/2014/main" id="{E4B3437C-A858-4055-9EEC-51B37B74304B}"/>
+              </a:ext>
+            </a:extLst>
+          </p:cNvPr>
+          <p:cNvSpPr txBox="1"/>
+          <p:nvPr/>
+        </p:nvSpPr>
+        <p:spPr>
+          <a:xfrm>
+            <a:off x="3725532" y="565511"/>
+            <a:ext cx="4524893" cy="461665"/>
+          </a:xfrm>
+          <a:prstGeom prst="rect">
+            <a:avLst/>
+          </a:prstGeom>
+          <a:noFill/>
+        </p:spPr>
+        <p:txBody>
+          <a:bodyPr wrap="none" rtlCol="0">
+            <a:spAutoFit/>
+          </a:bodyPr>
+          <a:lstStyle/>
+          <a:p>
+            <a:pPr algn="ctr"/>
+            <a:r>
+              <a:rPr lang="ru-RU" sz="2400" b="1" dirty="0">
+                <a:latin typeface="Times New Roman"/>
+              </a:rPr>
+              <a:t>Итоговый вид веб-приложения</a:t>
+            </a:r>
+            <a:endParaRPr lang="ru-RU" sz="2400" dirty="0">
+              <a:latin typeface="Times New Roman"/>
+            </a:endParaRPr>
+          </a:p>
+        </p:txBody>
+      </p:sp>
+      <p:pic>
+        <p:nvPicPr>
+          <p:cNvPr id="8" name="Рисунок 7">
+            <a:extLst>
+              <a:ext uri="{FF2B5EF4-FFF2-40B4-BE49-F238E27FC236}">
+                <a16:creationId xmlns:a16="http://schemas.microsoft.com/office/drawing/2014/main" id="{F1719BFF-6D67-4FB6-8FF3-CE73D290F106}"/>
+              </a:ext>
+            </a:extLst>
+          </p:cNvPr>
+          <p:cNvPicPr>
+            <a:picLocks noChangeAspect="1"/>
+          </p:cNvPicPr>
+          <p:nvPr/>
+        </p:nvPicPr>
+        <p:blipFill>
+          <a:blip r:embed="rId4" cstate="print">
+            <a:extLst>
+              <a:ext uri="{28A0092B-C50C-407E-A947-70E740481C1C}">
+                <a14:useLocalDpi xmlns:a14="http://schemas.microsoft.com/office/drawing/2010/main" val="0"/>
+              </a:ext>
+            </a:extLst>
+          </a:blip>
+          <a:srcRect/>
+          <a:stretch/>
+        </p:blipFill>
+        <p:spPr>
+          <a:xfrm>
+            <a:off x="343989" y="2314946"/>
+            <a:ext cx="5627466" cy="3064462"/>
+          </a:xfrm>
+          <a:prstGeom prst="rect">
+            <a:avLst/>
+          </a:prstGeom>
+        </p:spPr>
+      </p:pic>
+      <p:sp>
+        <p:nvSpPr>
+          <p:cNvPr id="9" name="TextBox 8">
+            <a:extLst>
+              <a:ext uri="{FF2B5EF4-FFF2-40B4-BE49-F238E27FC236}">
+                <a16:creationId xmlns:a16="http://schemas.microsoft.com/office/drawing/2014/main" id="{4A8306E3-66C6-47FA-8FE7-A05F19D35A19}"/>
+              </a:ext>
+            </a:extLst>
+          </p:cNvPr>
+          <p:cNvSpPr txBox="1"/>
+          <p:nvPr/>
+        </p:nvSpPr>
+        <p:spPr>
+          <a:xfrm>
+            <a:off x="1078165" y="5434578"/>
+            <a:ext cx="4159115" cy="307777"/>
+          </a:xfrm>
+          <a:prstGeom prst="rect">
+            <a:avLst/>
+          </a:prstGeom>
+          <a:noFill/>
+        </p:spPr>
+        <p:txBody>
+          <a:bodyPr wrap="square" rtlCol="0">
+            <a:spAutoFit/>
+          </a:bodyPr>
+          <a:lstStyle/>
+          <a:p>
+            <a:pPr algn="ctr"/>
+            <a:r>
+              <a:rPr lang="ru-RU" sz="1400" dirty="0">
+                <a:latin typeface="Times New Roman" panose="02020603050405020304" pitchFamily="18" charset="0"/>
+                <a:cs typeface="Times New Roman" panose="02020603050405020304" pitchFamily="18" charset="0"/>
+              </a:rPr>
+              <a:t>Рисунок 19 – </a:t>
+            </a:r>
+            <a:r>
+              <a:rPr lang="ru-RU" sz="1400" dirty="0">
+                <a:latin typeface="Times New Roman" panose="02020603050405020304" pitchFamily="18" charset="0"/>
+                <a:ea typeface="Calibri" panose="020F0502020204030204" pitchFamily="34" charset="0"/>
+                <a:cs typeface="Times New Roman" panose="02020603050405020304" pitchFamily="18" charset="0"/>
+              </a:rPr>
+              <a:t>Страница управления расписанием</a:t>
+            </a:r>
+            <a:endParaRPr lang="ru-RU" sz="1400" dirty="0">
+              <a:latin typeface="Times New Roman" panose="02020603050405020304" pitchFamily="18" charset="0"/>
+              <a:cs typeface="Times New Roman" panose="02020603050405020304" pitchFamily="18" charset="0"/>
+            </a:endParaRPr>
+          </a:p>
+        </p:txBody>
+      </p:sp>
+      <p:pic>
+        <p:nvPicPr>
+          <p:cNvPr id="12" name="Рисунок 11">
+            <a:extLst>
+              <a:ext uri="{FF2B5EF4-FFF2-40B4-BE49-F238E27FC236}">
+                <a16:creationId xmlns:a16="http://schemas.microsoft.com/office/drawing/2014/main" id="{3A58148F-9C1D-40A9-9BAE-49E05C0D9EFF}"/>
+              </a:ext>
+            </a:extLst>
+          </p:cNvPr>
+          <p:cNvPicPr>
+            <a:picLocks noChangeAspect="1"/>
+          </p:cNvPicPr>
+          <p:nvPr/>
+        </p:nvPicPr>
+        <p:blipFill>
+          <a:blip r:embed="rId5" cstate="print">
+            <a:extLst>
+              <a:ext uri="{28A0092B-C50C-407E-A947-70E740481C1C}">
+                <a14:useLocalDpi xmlns:a14="http://schemas.microsoft.com/office/drawing/2010/main" val="0"/>
+              </a:ext>
+            </a:extLst>
+          </a:blip>
+          <a:srcRect/>
+          <a:stretch/>
+        </p:blipFill>
+        <p:spPr>
+          <a:xfrm>
+            <a:off x="7340770" y="2313890"/>
+            <a:ext cx="3387015" cy="3066575"/>
+          </a:xfrm>
+          <a:prstGeom prst="rect">
+            <a:avLst/>
+          </a:prstGeom>
+        </p:spPr>
+      </p:pic>
+      <p:sp>
+        <p:nvSpPr>
+          <p:cNvPr id="13" name="TextBox 12">
+            <a:extLst>
+              <a:ext uri="{FF2B5EF4-FFF2-40B4-BE49-F238E27FC236}">
+                <a16:creationId xmlns:a16="http://schemas.microsoft.com/office/drawing/2014/main" id="{31CD9E65-022C-437B-BF06-47CC48054BE5}"/>
+              </a:ext>
+            </a:extLst>
+          </p:cNvPr>
+          <p:cNvSpPr txBox="1"/>
+          <p:nvPr/>
+        </p:nvSpPr>
+        <p:spPr>
+          <a:xfrm>
+            <a:off x="6225448" y="5434578"/>
+            <a:ext cx="5617659" cy="307777"/>
+          </a:xfrm>
+          <a:prstGeom prst="rect">
+            <a:avLst/>
+          </a:prstGeom>
+          <a:noFill/>
+        </p:spPr>
+        <p:txBody>
+          <a:bodyPr wrap="square" rtlCol="0">
+            <a:spAutoFit/>
+          </a:bodyPr>
+          <a:lstStyle/>
+          <a:p>
+            <a:pPr algn="ctr"/>
+            <a:r>
+              <a:rPr lang="ru-RU" sz="1400" dirty="0">
+                <a:latin typeface="Times New Roman" panose="02020603050405020304" pitchFamily="18" charset="0"/>
+                <a:cs typeface="Times New Roman" panose="02020603050405020304" pitchFamily="18" charset="0"/>
+              </a:rPr>
+              <a:t>Рисунок 20 – </a:t>
+            </a:r>
+            <a:r>
+              <a:rPr lang="ru-RU" sz="1400" dirty="0">
+                <a:latin typeface="Times New Roman" panose="02020603050405020304" pitchFamily="18" charset="0"/>
+                <a:ea typeface="Calibri" panose="020F0502020204030204" pitchFamily="34" charset="0"/>
+                <a:cs typeface="Times New Roman" panose="02020603050405020304" pitchFamily="18" charset="0"/>
+              </a:rPr>
+              <a:t>Модальное окно изменения записи в расписании</a:t>
+            </a:r>
+            <a:endParaRPr lang="ru-RU" sz="1400" dirty="0">
+              <a:latin typeface="Times New Roman" panose="02020603050405020304" pitchFamily="18" charset="0"/>
+              <a:cs typeface="Times New Roman" panose="02020603050405020304" pitchFamily="18" charset="0"/>
+            </a:endParaRPr>
+          </a:p>
+        </p:txBody>
+      </p:sp>
+    </p:spTree>
+    <p:extLst>
+      <p:ext uri="{BB962C8B-B14F-4D97-AF65-F5344CB8AC3E}">
+        <p14:creationId xmlns:p14="http://schemas.microsoft.com/office/powerpoint/2010/main" val="1832582512"/>
+      </p:ext>
+    </p:extLst>
+  </p:cSld>
+  <p:clrMapOvr>
+    <a:masterClrMapping/>
+  </p:clrMapOvr>
+</p:sld>
+</file>
+
+<file path=ppt/slides/slide15.xml><?xml version="1.0" encoding="utf-8"?>
+<p:sld xmlns:a="http://schemas.openxmlformats.org/drawingml/2006/main" xmlns:r="http://schemas.openxmlformats.org/officeDocument/2006/relationships" xmlns:p="http://schemas.openxmlformats.org/presentationml/2006/main">
+  <p:cSld>
+    <p:spTree>
+      <p:nvGrpSpPr>
+        <p:cNvPr id="1" name=""/>
+        <p:cNvGrpSpPr/>
+        <p:nvPr/>
+      </p:nvGrpSpPr>
+      <p:grpSpPr>
+        <a:xfrm>
+          <a:off x="0" y="0"/>
+          <a:ext cx="0" cy="0"/>
+          <a:chOff x="0" y="0"/>
+          <a:chExt cx="0" cy="0"/>
+        </a:xfrm>
+      </p:grpSpPr>
+      <p:pic>
+        <p:nvPicPr>
+          <p:cNvPr id="2" name="Рисунок 1"/>
+          <p:cNvPicPr>
+            <a:picLocks noChangeAspect="1"/>
+          </p:cNvPicPr>
+          <p:nvPr/>
+        </p:nvPicPr>
+        <p:blipFill>
+          <a:blip r:embed="rId2"/>
+          <a:stretch>
+            <a:fillRect/>
+          </a:stretch>
+        </p:blipFill>
+        <p:spPr>
+          <a:xfrm>
+            <a:off x="11116056" y="39624"/>
+            <a:ext cx="868680" cy="987552"/>
+          </a:xfrm>
+          <a:prstGeom prst="rect">
+            <a:avLst/>
+          </a:prstGeom>
+        </p:spPr>
+      </p:pic>
+      <p:sp>
+        <p:nvSpPr>
+          <p:cNvPr id="6" name="Прямоугольник 5"/>
+          <p:cNvSpPr/>
+          <p:nvPr/>
+        </p:nvSpPr>
+        <p:spPr>
+          <a:xfrm>
+            <a:off x="11103864" y="5919216"/>
+            <a:ext cx="353030" cy="234696"/>
+          </a:xfrm>
+          <a:prstGeom prst="rect">
+            <a:avLst/>
+          </a:prstGeom>
+        </p:spPr>
+        <p:txBody>
+          <a:bodyPr wrap="none" lIns="0" tIns="0" rIns="0" bIns="0">
+            <a:noAutofit/>
+          </a:bodyPr>
+          <a:lstStyle/>
+          <a:p>
+            <a:pPr indent="0"/>
+            <a:r>
+              <a:rPr lang="ru-RU" sz="2200" b="1">
+                <a:latin typeface="Times New Roman"/>
+              </a:rPr>
+              <a:t>15</a:t>
+            </a:r>
+            <a:endParaRPr lang="ru" sz="2200" b="1" dirty="0">
+              <a:latin typeface="Times New Roman"/>
+            </a:endParaRPr>
+          </a:p>
+        </p:txBody>
+      </p:sp>
+      <p:sp>
+        <p:nvSpPr>
+          <p:cNvPr id="7" name="TextBox 6">
+            <a:extLst>
+              <a:ext uri="{FF2B5EF4-FFF2-40B4-BE49-F238E27FC236}">
+                <a16:creationId xmlns:a16="http://schemas.microsoft.com/office/drawing/2014/main" id="{E4B3437C-A858-4055-9EEC-51B37B74304B}"/>
+              </a:ext>
+            </a:extLst>
+          </p:cNvPr>
+          <p:cNvSpPr txBox="1"/>
+          <p:nvPr/>
+        </p:nvSpPr>
+        <p:spPr>
+          <a:xfrm>
+            <a:off x="3725532" y="565511"/>
+            <a:ext cx="4524893" cy="461665"/>
+          </a:xfrm>
+          <a:prstGeom prst="rect">
+            <a:avLst/>
+          </a:prstGeom>
+          <a:noFill/>
+        </p:spPr>
+        <p:txBody>
+          <a:bodyPr wrap="none" rtlCol="0">
+            <a:spAutoFit/>
+          </a:bodyPr>
+          <a:lstStyle/>
+          <a:p>
+            <a:pPr algn="ctr"/>
+            <a:r>
+              <a:rPr lang="ru-RU" sz="2400" b="1" dirty="0">
+                <a:latin typeface="Times New Roman"/>
+              </a:rPr>
+              <a:t>Итоговый вид веб-приложения</a:t>
+            </a:r>
+            <a:endParaRPr lang="ru-RU" sz="2400" dirty="0">
+              <a:latin typeface="Times New Roman"/>
+            </a:endParaRPr>
+          </a:p>
+        </p:txBody>
+      </p:sp>
+      <p:pic>
+        <p:nvPicPr>
+          <p:cNvPr id="8" name="Рисунок 7">
+            <a:extLst>
+              <a:ext uri="{FF2B5EF4-FFF2-40B4-BE49-F238E27FC236}">
+                <a16:creationId xmlns:a16="http://schemas.microsoft.com/office/drawing/2014/main" id="{F1719BFF-6D67-4FB6-8FF3-CE73D290F106}"/>
+              </a:ext>
+            </a:extLst>
+          </p:cNvPr>
+          <p:cNvPicPr>
+            <a:picLocks noChangeAspect="1"/>
+          </p:cNvPicPr>
+          <p:nvPr/>
+        </p:nvPicPr>
+        <p:blipFill>
+          <a:blip r:embed="rId3" cstate="print">
+            <a:extLst>
+              <a:ext uri="{28A0092B-C50C-407E-A947-70E740481C1C}">
+                <a14:useLocalDpi xmlns:a14="http://schemas.microsoft.com/office/drawing/2010/main" val="0"/>
+              </a:ext>
+            </a:extLst>
+          </a:blip>
+          <a:srcRect/>
+          <a:stretch/>
+        </p:blipFill>
+        <p:spPr>
+          <a:xfrm>
+            <a:off x="346679" y="2314946"/>
+            <a:ext cx="5622086" cy="3064462"/>
+          </a:xfrm>
+          <a:prstGeom prst="rect">
+            <a:avLst/>
+          </a:prstGeom>
+        </p:spPr>
+      </p:pic>
+      <p:sp>
+        <p:nvSpPr>
+          <p:cNvPr id="9" name="TextBox 8">
+            <a:extLst>
+              <a:ext uri="{FF2B5EF4-FFF2-40B4-BE49-F238E27FC236}">
+                <a16:creationId xmlns:a16="http://schemas.microsoft.com/office/drawing/2014/main" id="{4A8306E3-66C6-47FA-8FE7-A05F19D35A19}"/>
+              </a:ext>
+            </a:extLst>
+          </p:cNvPr>
+          <p:cNvSpPr txBox="1"/>
+          <p:nvPr/>
+        </p:nvSpPr>
+        <p:spPr>
+          <a:xfrm>
+            <a:off x="1078165" y="5434578"/>
+            <a:ext cx="4159115" cy="307777"/>
+          </a:xfrm>
+          <a:prstGeom prst="rect">
+            <a:avLst/>
+          </a:prstGeom>
+          <a:noFill/>
+        </p:spPr>
+        <p:txBody>
+          <a:bodyPr wrap="square" rtlCol="0">
+            <a:spAutoFit/>
+          </a:bodyPr>
+          <a:lstStyle/>
+          <a:p>
+            <a:pPr algn="ctr"/>
+            <a:r>
+              <a:rPr lang="ru-RU" sz="1400" dirty="0">
+                <a:latin typeface="Times New Roman" panose="02020603050405020304" pitchFamily="18" charset="0"/>
+                <a:cs typeface="Times New Roman" panose="02020603050405020304" pitchFamily="18" charset="0"/>
+              </a:rPr>
+              <a:t>Рисунок 21 – </a:t>
+            </a:r>
+            <a:r>
+              <a:rPr lang="ru-RU" sz="1400" dirty="0">
+                <a:latin typeface="Times New Roman" panose="02020603050405020304" pitchFamily="18" charset="0"/>
+                <a:ea typeface="Calibri" panose="020F0502020204030204" pitchFamily="34" charset="0"/>
+                <a:cs typeface="Times New Roman" panose="02020603050405020304" pitchFamily="18" charset="0"/>
+              </a:rPr>
+              <a:t>Страница управления тегами</a:t>
+            </a:r>
+            <a:endParaRPr lang="ru-RU" sz="1400" dirty="0">
+              <a:latin typeface="Times New Roman" panose="02020603050405020304" pitchFamily="18" charset="0"/>
+              <a:cs typeface="Times New Roman" panose="02020603050405020304" pitchFamily="18" charset="0"/>
+            </a:endParaRPr>
+          </a:p>
+        </p:txBody>
+      </p:sp>
+      <p:pic>
+        <p:nvPicPr>
+          <p:cNvPr id="12" name="Рисунок 11">
+            <a:extLst>
+              <a:ext uri="{FF2B5EF4-FFF2-40B4-BE49-F238E27FC236}">
+                <a16:creationId xmlns:a16="http://schemas.microsoft.com/office/drawing/2014/main" id="{3A58148F-9C1D-40A9-9BAE-49E05C0D9EFF}"/>
+              </a:ext>
+            </a:extLst>
+          </p:cNvPr>
+          <p:cNvPicPr>
+            <a:picLocks noChangeAspect="1"/>
+          </p:cNvPicPr>
+          <p:nvPr/>
+        </p:nvPicPr>
+        <p:blipFill>
+          <a:blip r:embed="rId4">
+            <a:extLst>
+              <a:ext uri="{28A0092B-C50C-407E-A947-70E740481C1C}">
+                <a14:useLocalDpi xmlns:a14="http://schemas.microsoft.com/office/drawing/2010/main" val="0"/>
+              </a:ext>
+            </a:extLst>
+          </a:blip>
+          <a:srcRect/>
+          <a:stretch/>
+        </p:blipFill>
+        <p:spPr>
+          <a:xfrm>
+            <a:off x="6225447" y="2684204"/>
+            <a:ext cx="5617660" cy="2695204"/>
+          </a:xfrm>
+          <a:prstGeom prst="rect">
+            <a:avLst/>
+          </a:prstGeom>
+        </p:spPr>
+      </p:pic>
+      <p:sp>
+        <p:nvSpPr>
+          <p:cNvPr id="13" name="TextBox 12">
+            <a:extLst>
+              <a:ext uri="{FF2B5EF4-FFF2-40B4-BE49-F238E27FC236}">
+                <a16:creationId xmlns:a16="http://schemas.microsoft.com/office/drawing/2014/main" id="{31CD9E65-022C-437B-BF06-47CC48054BE5}"/>
+              </a:ext>
+            </a:extLst>
+          </p:cNvPr>
+          <p:cNvSpPr txBox="1"/>
+          <p:nvPr/>
+        </p:nvSpPr>
+        <p:spPr>
+          <a:xfrm>
+            <a:off x="6225448" y="5434578"/>
+            <a:ext cx="5617659" cy="307777"/>
+          </a:xfrm>
+          <a:prstGeom prst="rect">
+            <a:avLst/>
+          </a:prstGeom>
+          <a:noFill/>
+        </p:spPr>
+        <p:txBody>
+          <a:bodyPr wrap="square" rtlCol="0">
+            <a:spAutoFit/>
+          </a:bodyPr>
+          <a:lstStyle/>
+          <a:p>
+            <a:pPr algn="ctr"/>
+            <a:r>
+              <a:rPr lang="ru-RU" sz="1400" dirty="0">
+                <a:latin typeface="Times New Roman" panose="02020603050405020304" pitchFamily="18" charset="0"/>
+                <a:cs typeface="Times New Roman" panose="02020603050405020304" pitchFamily="18" charset="0"/>
+              </a:rPr>
+              <a:t>Рисунок 22 – </a:t>
+            </a:r>
+            <a:r>
+              <a:rPr lang="ru-RU" sz="1400" dirty="0">
+                <a:latin typeface="Times New Roman" panose="02020603050405020304" pitchFamily="18" charset="0"/>
+                <a:ea typeface="Calibri" panose="020F0502020204030204" pitchFamily="34" charset="0"/>
+                <a:cs typeface="Times New Roman" panose="02020603050405020304" pitchFamily="18" charset="0"/>
+              </a:rPr>
+              <a:t>Модальное окно редактирования тега</a:t>
+            </a:r>
+            <a:endParaRPr lang="ru-RU" sz="1400" dirty="0">
+              <a:latin typeface="Times New Roman" panose="02020603050405020304" pitchFamily="18" charset="0"/>
+              <a:cs typeface="Times New Roman" panose="02020603050405020304" pitchFamily="18" charset="0"/>
+            </a:endParaRPr>
+          </a:p>
+        </p:txBody>
+      </p:sp>
+    </p:spTree>
+    <p:extLst>
+      <p:ext uri="{BB962C8B-B14F-4D97-AF65-F5344CB8AC3E}">
+        <p14:creationId xmlns:p14="http://schemas.microsoft.com/office/powerpoint/2010/main" val="199532084"/>
+      </p:ext>
+    </p:extLst>
+  </p:cSld>
+  <p:clrMapOvr>
+    <a:masterClrMapping/>
+  </p:clrMapOvr>
+</p:sld>
+</file>
+
+<file path=ppt/slides/slide16.xml><?xml version="1.0" encoding="utf-8"?>
 <p:sld xmlns:a="http://schemas.openxmlformats.org/drawingml/2006/main" xmlns:r="http://schemas.openxmlformats.org/officeDocument/2006/relationships" xmlns:p="http://schemas.openxmlformats.org/presentationml/2006/main">
   <p:cSld>
     <p:bg>
@@ -2137,7 +4353,7 @@
           <p:nvPr/>
         </p:nvPicPr>
         <p:blipFill>
-          <a:blip r:embed="rId2"/>
+          <a:blip r:embed="rId3"/>
           <a:stretch>
             <a:fillRect/>
           </a:stretch>
@@ -2427,7 +4643,7 @@
           <p:nvPr/>
         </p:nvPicPr>
         <p:blipFill>
-          <a:blip r:embed="rId2"/>
+          <a:blip r:embed="rId3"/>
           <a:stretch>
             <a:fillRect/>
           </a:stretch>
@@ -2534,7 +4750,7 @@
           <p:nvPr/>
         </p:nvPicPr>
         <p:blipFill>
-          <a:blip r:embed="rId3">
+          <a:blip r:embed="rId4">
             <a:extLst>
               <a:ext uri="{28A0092B-C50C-407E-A947-70E740481C1C}">
                 <a14:useLocalDpi xmlns:a14="http://schemas.microsoft.com/office/drawing/2010/main" val="0"/>
@@ -2628,7 +4844,7 @@
           <p:nvPr/>
         </p:nvPicPr>
         <p:blipFill>
-          <a:blip r:embed="rId4" cstate="print">
+          <a:blip r:embed="rId5" cstate="print">
             <a:extLst>
               <a:ext uri="{28A0092B-C50C-407E-A947-70E740481C1C}">
                 <a14:useLocalDpi xmlns:a14="http://schemas.microsoft.com/office/drawing/2010/main" val="0"/>
@@ -2736,7 +4952,7 @@
           <p:nvPr/>
         </p:nvPicPr>
         <p:blipFill>
-          <a:blip r:embed="rId5" cstate="print">
+          <a:blip r:embed="rId6" cstate="print">
             <a:extLst>
               <a:ext uri="{28A0092B-C50C-407E-A947-70E740481C1C}">
                 <a14:useLocalDpi xmlns:a14="http://schemas.microsoft.com/office/drawing/2010/main" val="0"/>
@@ -2868,7 +5084,7 @@
           <p:nvPr/>
         </p:nvPicPr>
         <p:blipFill>
-          <a:blip r:embed="rId2"/>
+          <a:blip r:embed="rId3"/>
           <a:stretch>
             <a:fillRect/>
           </a:stretch>
@@ -2975,7 +5191,7 @@
           <p:nvPr/>
         </p:nvPicPr>
         <p:blipFill>
-          <a:blip r:embed="rId3">
+          <a:blip r:embed="rId4">
             <a:extLst>
               <a:ext uri="{28A0092B-C50C-407E-A947-70E740481C1C}">
                 <a14:useLocalDpi xmlns:a14="http://schemas.microsoft.com/office/drawing/2010/main" val="0"/>
@@ -3115,7 +5331,7 @@
           <p:nvPr/>
         </p:nvPicPr>
         <p:blipFill>
-          <a:blip r:embed="rId2"/>
+          <a:blip r:embed="rId3"/>
           <a:stretch>
             <a:fillRect/>
           </a:stretch>
@@ -3225,14 +5441,11 @@
               </a:lnSpc>
             </a:pPr>
             <a:r>
-              <a:rPr lang="en-US" sz="2000" dirty="0" err="1">
+              <a:rPr lang="en-US" sz="2000" dirty="0">
                 <a:latin typeface="Times New Roman"/>
               </a:rPr>
-              <a:t>PostgrSQL</a:t>
-            </a:r>
-            <a:endParaRPr lang="en-US" sz="2000" dirty="0">
-              <a:latin typeface="Times New Roman"/>
-            </a:endParaRPr>
+              <a:t>PostgreSQL</a:t>
+            </a:r>
           </a:p>
           <a:p>
             <a:pPr indent="0">
@@ -3378,7 +5591,7 @@
           <p:nvPr/>
         </p:nvPicPr>
         <p:blipFill>
-          <a:blip r:embed="rId2"/>
+          <a:blip r:embed="rId3"/>
           <a:stretch>
             <a:fillRect/>
           </a:stretch>
@@ -3480,7 +5693,7 @@
           <p:nvPr/>
         </p:nvPicPr>
         <p:blipFill>
-          <a:blip r:embed="rId3">
+          <a:blip r:embed="rId4">
             <a:extLst>
               <a:ext uri="{28A0092B-C50C-407E-A947-70E740481C1C}">
                 <a14:useLocalDpi xmlns:a14="http://schemas.microsoft.com/office/drawing/2010/main" val="0"/>
@@ -3574,7 +5787,7 @@
           <p:nvPr/>
         </p:nvPicPr>
         <p:blipFill>
-          <a:blip r:embed="rId4">
+          <a:blip r:embed="rId5">
             <a:extLst>
               <a:ext uri="{28A0092B-C50C-407E-A947-70E740481C1C}">
                 <a14:useLocalDpi xmlns:a14="http://schemas.microsoft.com/office/drawing/2010/main" val="0"/>
@@ -3684,7 +5897,7 @@
           <p:nvPr/>
         </p:nvPicPr>
         <p:blipFill>
-          <a:blip r:embed="rId2"/>
+          <a:blip r:embed="rId3"/>
           <a:stretch>
             <a:fillRect/>
           </a:stretch>
@@ -3786,7 +5999,7 @@
           <p:nvPr/>
         </p:nvPicPr>
         <p:blipFill>
-          <a:blip r:embed="rId3">
+          <a:blip r:embed="rId4">
             <a:extLst>
               <a:ext uri="{28A0092B-C50C-407E-A947-70E740481C1C}">
                 <a14:useLocalDpi xmlns:a14="http://schemas.microsoft.com/office/drawing/2010/main" val="0"/>
@@ -3872,7 +6085,7 @@
           <p:nvPr/>
         </p:nvPicPr>
         <p:blipFill>
-          <a:blip r:embed="rId4">
+          <a:blip r:embed="rId5">
             <a:extLst>
               <a:ext uri="{28A0092B-C50C-407E-A947-70E740481C1C}">
                 <a14:useLocalDpi xmlns:a14="http://schemas.microsoft.com/office/drawing/2010/main" val="0"/>
@@ -3982,7 +6195,7 @@
           <p:nvPr/>
         </p:nvPicPr>
         <p:blipFill>
-          <a:blip r:embed="rId2"/>
+          <a:blip r:embed="rId3"/>
           <a:stretch>
             <a:fillRect/>
           </a:stretch>
@@ -4096,7 +6309,7 @@
           <p:nvPr/>
         </p:nvPicPr>
         <p:blipFill>
-          <a:blip r:embed="rId3">
+          <a:blip r:embed="rId4">
             <a:extLst>
               <a:ext uri="{28A0092B-C50C-407E-A947-70E740481C1C}">
                 <a14:useLocalDpi xmlns:a14="http://schemas.microsoft.com/office/drawing/2010/main" val="0"/>
@@ -4108,8 +6321,8 @@
         </p:blipFill>
         <p:spPr>
           <a:xfrm>
-            <a:off x="579698" y="3589250"/>
-            <a:ext cx="4085630" cy="1746528"/>
+            <a:off x="579698" y="3982145"/>
+            <a:ext cx="4085630" cy="1322966"/>
           </a:xfrm>
           <a:prstGeom prst="rect">
             <a:avLst/>
@@ -4196,7 +6409,7 @@
           <p:nvPr/>
         </p:nvPicPr>
         <p:blipFill>
-          <a:blip r:embed="rId4">
+          <a:blip r:embed="rId5">
             <a:extLst>
               <a:ext uri="{28A0092B-C50C-407E-A947-70E740481C1C}">
                 <a14:useLocalDpi xmlns:a14="http://schemas.microsoft.com/office/drawing/2010/main" val="0"/>
@@ -4208,8 +6421,8 @@
         </p:blipFill>
         <p:spPr>
           <a:xfrm>
-            <a:off x="5123728" y="1765788"/>
-            <a:ext cx="6281334" cy="3614677"/>
+            <a:off x="5123728" y="1841141"/>
+            <a:ext cx="6281334" cy="3463970"/>
           </a:xfrm>
           <a:prstGeom prst="rect">
             <a:avLst/>
@@ -4231,7 +6444,7 @@
         <p:spPr>
           <a:xfrm>
             <a:off x="5192031" y="5434578"/>
-            <a:ext cx="6144728" cy="307777"/>
+            <a:ext cx="6144728" cy="523220"/>
           </a:xfrm>
           <a:prstGeom prst="rect">
             <a:avLst/>
@@ -4258,7 +6471,22 @@
                 <a:latin typeface="Times New Roman" panose="02020603050405020304" pitchFamily="18" charset="0"/>
                 <a:ea typeface="Calibri" panose="020F0502020204030204" pitchFamily="34" charset="0"/>
               </a:rPr>
-              <a:t>Фрагмент миграции по созданию таблицы для сущности «Тег»</a:t>
+              <a:t>Фрагмент миграции по созданию таблицы для сущности </a:t>
+            </a:r>
+            <a:br>
+              <a:rPr lang="en-US" sz="1400" dirty="0">
+                <a:effectLst/>
+                <a:latin typeface="Times New Roman" panose="02020603050405020304" pitchFamily="18" charset="0"/>
+                <a:ea typeface="Calibri" panose="020F0502020204030204" pitchFamily="34" charset="0"/>
+              </a:rPr>
+            </a:br>
+            <a:r>
+              <a:rPr lang="ru-RU" sz="1400" dirty="0">
+                <a:effectLst/>
+                <a:latin typeface="Times New Roman" panose="02020603050405020304" pitchFamily="18" charset="0"/>
+                <a:ea typeface="Calibri" panose="020F0502020204030204" pitchFamily="34" charset="0"/>
+              </a:rPr>
+              <a:t>«Запись в расписании»</a:t>
             </a:r>
             <a:endParaRPr lang="ru-RU" sz="1400" dirty="0">
               <a:latin typeface="Times New Roman" panose="02020603050405020304" pitchFamily="18" charset="0"/>
@@ -4306,7 +6534,7 @@
           <p:nvPr/>
         </p:nvPicPr>
         <p:blipFill>
-          <a:blip r:embed="rId2"/>
+          <a:blip r:embed="rId3"/>
           <a:stretch>
             <a:fillRect/>
           </a:stretch>
@@ -4420,7 +6648,7 @@
           <p:nvPr/>
         </p:nvPicPr>
         <p:blipFill>
-          <a:blip r:embed="rId3">
+          <a:blip r:embed="rId4">
             <a:extLst>
               <a:ext uri="{28A0092B-C50C-407E-A947-70E740481C1C}">
                 <a14:useLocalDpi xmlns:a14="http://schemas.microsoft.com/office/drawing/2010/main" val="0"/>
@@ -4432,8 +6660,8 @@
         </p:blipFill>
         <p:spPr>
           <a:xfrm>
-            <a:off x="787517" y="4036610"/>
-            <a:ext cx="4085630" cy="1343855"/>
+            <a:off x="787517" y="4487475"/>
+            <a:ext cx="4085630" cy="892990"/>
           </a:xfrm>
           <a:prstGeom prst="rect">
             <a:avLst/>
@@ -4506,7 +6734,7 @@
           <p:nvPr/>
         </p:nvPicPr>
         <p:blipFill>
-          <a:blip r:embed="rId4">
+          <a:blip r:embed="rId5">
             <a:extLst>
               <a:ext uri="{28A0092B-C50C-407E-A947-70E740481C1C}">
                 <a14:useLocalDpi xmlns:a14="http://schemas.microsoft.com/office/drawing/2010/main" val="0"/>
@@ -4518,8 +6746,8 @@
         </p:blipFill>
         <p:spPr>
           <a:xfrm>
-            <a:off x="6579414" y="1765788"/>
-            <a:ext cx="3626508" cy="3614677"/>
+            <a:off x="6889110" y="1765788"/>
+            <a:ext cx="3007116" cy="3614677"/>
           </a:xfrm>
           <a:prstGeom prst="rect">
             <a:avLst/>
@@ -4568,7 +6796,7 @@
                 <a:latin typeface="Times New Roman" panose="02020603050405020304" pitchFamily="18" charset="0"/>
                 <a:ea typeface="Calibri" panose="020F0502020204030204" pitchFamily="34" charset="0"/>
               </a:rPr>
-              <a:t>Фрагмент модели для сущности «Тег»</a:t>
+              <a:t>Фрагмент модели сущности «Запись в расписании»</a:t>
             </a:r>
             <a:endParaRPr lang="ru-RU" sz="1400" dirty="0">
               <a:latin typeface="Times New Roman" panose="02020603050405020304" pitchFamily="18" charset="0"/>
@@ -4871,4 +7099,299 @@
   <a:objectDefaults/>
   <a:extraClrSchemeLst/>
 </a:theme>
+</file>
+
+<file path=ppt/theme/theme2.xml><?xml version="1.0" encoding="utf-8"?>
+<a:theme xmlns:a="http://schemas.openxmlformats.org/drawingml/2006/main" name="Тема Office">
+  <a:themeElements>
+    <a:clrScheme name="Стандартная">
+      <a:dk1>
+        <a:sysClr val="windowText" lastClr="000000"/>
+      </a:dk1>
+      <a:lt1>
+        <a:sysClr val="window" lastClr="FFFFFF"/>
+      </a:lt1>
+      <a:dk2>
+        <a:srgbClr val="44546A"/>
+      </a:dk2>
+      <a:lt2>
+        <a:srgbClr val="E7E6E6"/>
+      </a:lt2>
+      <a:accent1>
+        <a:srgbClr val="4472C4"/>
+      </a:accent1>
+      <a:accent2>
+        <a:srgbClr val="ED7D31"/>
+      </a:accent2>
+      <a:accent3>
+        <a:srgbClr val="A5A5A5"/>
+      </a:accent3>
+      <a:accent4>
+        <a:srgbClr val="FFC000"/>
+      </a:accent4>
+      <a:accent5>
+        <a:srgbClr val="5B9BD5"/>
+      </a:accent5>
+      <a:accent6>
+        <a:srgbClr val="70AD47"/>
+      </a:accent6>
+      <a:hlink>
+        <a:srgbClr val="0563C1"/>
+      </a:hlink>
+      <a:folHlink>
+        <a:srgbClr val="954F72"/>
+      </a:folHlink>
+    </a:clrScheme>
+    <a:fontScheme name="Стандартная">
+      <a:majorFont>
+        <a:latin typeface="Calibri Light" panose="020F0302020204030204"/>
+        <a:ea typeface=""/>
+        <a:cs typeface=""/>
+        <a:font script="Jpan" typeface="游ゴシック Light"/>
+        <a:font script="Hang" typeface="맑은 고딕"/>
+        <a:font script="Hans" typeface="等线 Light"/>
+        <a:font script="Hant" typeface="新細明體"/>
+        <a:font script="Arab" typeface="Times New Roman"/>
+        <a:font script="Hebr" typeface="Times New Roman"/>
+        <a:font script="Thai" typeface="Angsana New"/>
+        <a:font script="Ethi" typeface="Nyala"/>
+        <a:font script="Beng" typeface="Vrinda"/>
+        <a:font script="Gujr" typeface="Shruti"/>
+        <a:font script="Khmr" typeface="MoolBoran"/>
+        <a:font script="Knda" typeface="Tunga"/>
+        <a:font script="Guru" typeface="Raavi"/>
+        <a:font script="Cans" typeface="Euphemia"/>
+        <a:font script="Cher" typeface="Plantagenet Cherokee"/>
+        <a:font script="Yiii" typeface="Microsoft Yi Baiti"/>
+        <a:font script="Tibt" typeface="Microsoft Himalaya"/>
+        <a:font script="Thaa" typeface="MV Boli"/>
+        <a:font script="Deva" typeface="Mangal"/>
+        <a:font script="Telu" typeface="Gautami"/>
+        <a:font script="Taml" typeface="Latha"/>
+        <a:font script="Syrc" typeface="Estrangelo Edessa"/>
+        <a:font script="Orya" typeface="Kalinga"/>
+        <a:font script="Mlym" typeface="Kartika"/>
+        <a:font script="Laoo" typeface="DokChampa"/>
+        <a:font script="Sinh" typeface="Iskoola Pota"/>
+        <a:font script="Mong" typeface="Mongolian Baiti"/>
+        <a:font script="Viet" typeface="Times New Roman"/>
+        <a:font script="Uigh" typeface="Microsoft Uighur"/>
+        <a:font script="Geor" typeface="Sylfaen"/>
+        <a:font script="Armn" typeface="Arial"/>
+        <a:font script="Bugi" typeface="Leelawadee UI"/>
+        <a:font script="Bopo" typeface="Microsoft JhengHei"/>
+        <a:font script="Java" typeface="Javanese Text"/>
+        <a:font script="Lisu" typeface="Segoe UI"/>
+        <a:font script="Mymr" typeface="Myanmar Text"/>
+        <a:font script="Nkoo" typeface="Ebrima"/>
+        <a:font script="Olck" typeface="Nirmala UI"/>
+        <a:font script="Osma" typeface="Ebrima"/>
+        <a:font script="Phag" typeface="Phagspa"/>
+        <a:font script="Syrn" typeface="Estrangelo Edessa"/>
+        <a:font script="Syrj" typeface="Estrangelo Edessa"/>
+        <a:font script="Syre" typeface="Estrangelo Edessa"/>
+        <a:font script="Sora" typeface="Nirmala UI"/>
+        <a:font script="Tale" typeface="Microsoft Tai Le"/>
+        <a:font script="Talu" typeface="Microsoft New Tai Lue"/>
+        <a:font script="Tfng" typeface="Ebrima"/>
+      </a:majorFont>
+      <a:minorFont>
+        <a:latin typeface="Calibri" panose="020F0502020204030204"/>
+        <a:ea typeface=""/>
+        <a:cs typeface=""/>
+        <a:font script="Jpan" typeface="游ゴシック"/>
+        <a:font script="Hang" typeface="맑은 고딕"/>
+        <a:font script="Hans" typeface="等线"/>
+        <a:font script="Hant" typeface="新細明體"/>
+        <a:font script="Arab" typeface="Arial"/>
+        <a:font script="Hebr" typeface="Arial"/>
+        <a:font script="Thai" typeface="Cordia New"/>
+        <a:font script="Ethi" typeface="Nyala"/>
+        <a:font script="Beng" typeface="Vrinda"/>
+        <a:font script="Gujr" typeface="Shruti"/>
+        <a:font script="Khmr" typeface="DaunPenh"/>
+        <a:font script="Knda" typeface="Tunga"/>
+        <a:font script="Guru" typeface="Raavi"/>
+        <a:font script="Cans" typeface="Euphemia"/>
+        <a:font script="Cher" typeface="Plantagenet Cherokee"/>
+        <a:font script="Yiii" typeface="Microsoft Yi Baiti"/>
+        <a:font script="Tibt" typeface="Microsoft Himalaya"/>
+        <a:font script="Thaa" typeface="MV Boli"/>
+        <a:font script="Deva" typeface="Mangal"/>
+        <a:font script="Telu" typeface="Gautami"/>
+        <a:font script="Taml" typeface="Latha"/>
+        <a:font script="Syrc" typeface="Estrangelo Edessa"/>
+        <a:font script="Orya" typeface="Kalinga"/>
+        <a:font script="Mlym" typeface="Kartika"/>
+        <a:font script="Laoo" typeface="DokChampa"/>
+        <a:font script="Sinh" typeface="Iskoola Pota"/>
+        <a:font script="Mong" typeface="Mongolian Baiti"/>
+        <a:font script="Viet" typeface="Arial"/>
+        <a:font script="Uigh" typeface="Microsoft Uighur"/>
+        <a:font script="Geor" typeface="Sylfaen"/>
+        <a:font script="Armn" typeface="Arial"/>
+        <a:font script="Bugi" typeface="Leelawadee UI"/>
+        <a:font script="Bopo" typeface="Microsoft JhengHei"/>
+        <a:font script="Java" typeface="Javanese Text"/>
+        <a:font script="Lisu" typeface="Segoe UI"/>
+        <a:font script="Mymr" typeface="Myanmar Text"/>
+        <a:font script="Nkoo" typeface="Ebrima"/>
+        <a:font script="Olck" typeface="Nirmala UI"/>
+        <a:font script="Osma" typeface="Ebrima"/>
+        <a:font script="Phag" typeface="Phagspa"/>
+        <a:font script="Syrn" typeface="Estrangelo Edessa"/>
+        <a:font script="Syrj" typeface="Estrangelo Edessa"/>
+        <a:font script="Syre" typeface="Estrangelo Edessa"/>
+        <a:font script="Sora" typeface="Nirmala UI"/>
+        <a:font script="Tale" typeface="Microsoft Tai Le"/>
+        <a:font script="Talu" typeface="Microsoft New Tai Lue"/>
+        <a:font script="Tfng" typeface="Ebrima"/>
+      </a:minorFont>
+    </a:fontScheme>
+    <a:fmtScheme name="Стандартная">
+      <a:fillStyleLst>
+        <a:solidFill>
+          <a:schemeClr val="phClr"/>
+        </a:solidFill>
+        <a:gradFill rotWithShape="1">
+          <a:gsLst>
+            <a:gs pos="0">
+              <a:schemeClr val="phClr">
+                <a:lumMod val="110000"/>
+                <a:satMod val="105000"/>
+                <a:tint val="67000"/>
+              </a:schemeClr>
+            </a:gs>
+            <a:gs pos="50000">
+              <a:schemeClr val="phClr">
+                <a:lumMod val="105000"/>
+                <a:satMod val="103000"/>
+                <a:tint val="73000"/>
+              </a:schemeClr>
+            </a:gs>
+            <a:gs pos="100000">
+              <a:schemeClr val="phClr">
+                <a:lumMod val="105000"/>
+                <a:satMod val="109000"/>
+                <a:tint val="81000"/>
+              </a:schemeClr>
+            </a:gs>
+          </a:gsLst>
+          <a:lin ang="5400000" scaled="0"/>
+        </a:gradFill>
+        <a:gradFill rotWithShape="1">
+          <a:gsLst>
+            <a:gs pos="0">
+              <a:schemeClr val="phClr">
+                <a:satMod val="103000"/>
+                <a:lumMod val="102000"/>
+                <a:tint val="94000"/>
+              </a:schemeClr>
+            </a:gs>
+            <a:gs pos="50000">
+              <a:schemeClr val="phClr">
+                <a:satMod val="110000"/>
+                <a:lumMod val="100000"/>
+                <a:shade val="100000"/>
+              </a:schemeClr>
+            </a:gs>
+            <a:gs pos="100000">
+              <a:schemeClr val="phClr">
+                <a:lumMod val="99000"/>
+                <a:satMod val="120000"/>
+                <a:shade val="78000"/>
+              </a:schemeClr>
+            </a:gs>
+          </a:gsLst>
+          <a:lin ang="5400000" scaled="0"/>
+        </a:gradFill>
+      </a:fillStyleLst>
+      <a:lnStyleLst>
+        <a:ln w="6350" cap="flat" cmpd="sng" algn="ctr">
+          <a:solidFill>
+            <a:schemeClr val="phClr"/>
+          </a:solidFill>
+          <a:prstDash val="solid"/>
+          <a:miter lim="800000"/>
+        </a:ln>
+        <a:ln w="12700" cap="flat" cmpd="sng" algn="ctr">
+          <a:solidFill>
+            <a:schemeClr val="phClr"/>
+          </a:solidFill>
+          <a:prstDash val="solid"/>
+          <a:miter lim="800000"/>
+        </a:ln>
+        <a:ln w="19050" cap="flat" cmpd="sng" algn="ctr">
+          <a:solidFill>
+            <a:schemeClr val="phClr"/>
+          </a:solidFill>
+          <a:prstDash val="solid"/>
+          <a:miter lim="800000"/>
+        </a:ln>
+      </a:lnStyleLst>
+      <a:effectStyleLst>
+        <a:effectStyle>
+          <a:effectLst/>
+        </a:effectStyle>
+        <a:effectStyle>
+          <a:effectLst/>
+        </a:effectStyle>
+        <a:effectStyle>
+          <a:effectLst>
+            <a:outerShdw blurRad="57150" dist="19050" dir="5400000" algn="ctr" rotWithShape="0">
+              <a:srgbClr val="000000">
+                <a:alpha val="63000"/>
+              </a:srgbClr>
+            </a:outerShdw>
+          </a:effectLst>
+        </a:effectStyle>
+      </a:effectStyleLst>
+      <a:bgFillStyleLst>
+        <a:solidFill>
+          <a:schemeClr val="phClr"/>
+        </a:solidFill>
+        <a:solidFill>
+          <a:schemeClr val="phClr">
+            <a:tint val="95000"/>
+            <a:satMod val="170000"/>
+          </a:schemeClr>
+        </a:solidFill>
+        <a:gradFill rotWithShape="1">
+          <a:gsLst>
+            <a:gs pos="0">
+              <a:schemeClr val="phClr">
+                <a:tint val="93000"/>
+                <a:satMod val="150000"/>
+                <a:shade val="98000"/>
+                <a:lumMod val="102000"/>
+              </a:schemeClr>
+            </a:gs>
+            <a:gs pos="50000">
+              <a:schemeClr val="phClr">
+                <a:tint val="98000"/>
+                <a:satMod val="130000"/>
+                <a:shade val="90000"/>
+                <a:lumMod val="103000"/>
+              </a:schemeClr>
+            </a:gs>
+            <a:gs pos="100000">
+              <a:schemeClr val="phClr">
+                <a:shade val="63000"/>
+                <a:satMod val="120000"/>
+              </a:schemeClr>
+            </a:gs>
+          </a:gsLst>
+          <a:lin ang="5400000" scaled="0"/>
+        </a:gradFill>
+      </a:bgFillStyleLst>
+    </a:fmtScheme>
+  </a:themeElements>
+  <a:objectDefaults/>
+  <a:extraClrSchemeLst/>
+  <a:extLst>
+    <a:ext uri="{05A4C25C-085E-4340-85A3-A5531E510DB2}">
+      <thm15:themeFamily xmlns:thm15="http://schemas.microsoft.com/office/thememl/2012/main" name="Office Theme" id="{62F939B6-93AF-4DB8-9C6B-D6C7DFDC589F}" vid="{4A3C46E8-61CC-4603-A589-7422A47A8E4A}"/>
+    </a:ext>
+  </a:extLst>
+</a:theme>
 </file>